--- a/docs/pptx/whole/ritu-linsubhr-sens-sideeffect.pptx
+++ b/docs/pptx/whole/ritu-linsubhr-sens-sideeffect.pptx
@@ -2443,7 +2443,7 @@
           </p:nvSpPr>
           <p:spPr>
             <a:xfrm>
-              <a:off x="2520195" y="2073503"/>
+              <a:off x="2520043" y="2073503"/>
               <a:ext cx="0" cy="3649639"/>
             </a:xfrm>
             <a:custGeom>
@@ -2486,7 +2486,7 @@
           </p:nvSpPr>
           <p:spPr>
             <a:xfrm>
-              <a:off x="4326850" y="2073503"/>
+              <a:off x="4325074" y="2073503"/>
               <a:ext cx="0" cy="3649639"/>
             </a:xfrm>
             <a:custGeom>
@@ -2529,7 +2529,7 @@
           </p:nvSpPr>
           <p:spPr>
             <a:xfrm>
-              <a:off x="6133505" y="2073503"/>
+              <a:off x="6130105" y="2073503"/>
               <a:ext cx="0" cy="3649639"/>
             </a:xfrm>
             <a:custGeom>
@@ -2572,7 +2572,7 @@
           </p:nvSpPr>
           <p:spPr>
             <a:xfrm>
-              <a:off x="7940161" y="2073503"/>
+              <a:off x="7935136" y="2073503"/>
               <a:ext cx="0" cy="3649639"/>
             </a:xfrm>
             <a:custGeom>
@@ -2830,7 +2830,7 @@
           </p:nvSpPr>
           <p:spPr>
             <a:xfrm>
-              <a:off x="1616868" y="2073503"/>
+              <a:off x="1617528" y="2073503"/>
               <a:ext cx="0" cy="3649639"/>
             </a:xfrm>
             <a:custGeom>
@@ -2873,7 +2873,7 @@
           </p:nvSpPr>
           <p:spPr>
             <a:xfrm>
-              <a:off x="3423523" y="2073503"/>
+              <a:off x="3422559" y="2073503"/>
               <a:ext cx="0" cy="3649639"/>
             </a:xfrm>
             <a:custGeom>
@@ -2916,7 +2916,7 @@
           </p:nvSpPr>
           <p:spPr>
             <a:xfrm>
-              <a:off x="5230178" y="2073503"/>
+              <a:off x="5227590" y="2073503"/>
               <a:ext cx="0" cy="3649639"/>
             </a:xfrm>
             <a:custGeom>
@@ -2959,7 +2959,7 @@
           </p:nvSpPr>
           <p:spPr>
             <a:xfrm>
-              <a:off x="7036833" y="2073503"/>
+              <a:off x="7032620" y="2073503"/>
               <a:ext cx="0" cy="3649639"/>
             </a:xfrm>
             <a:custGeom>
@@ -3002,612 +3002,612 @@
           </p:nvSpPr>
           <p:spPr>
             <a:xfrm>
-              <a:off x="1172049" y="2512745"/>
-              <a:ext cx="7090630" cy="2875071"/>
+              <a:off x="1172049" y="2469169"/>
+              <a:ext cx="7090630" cy="2920907"/>
             </a:xfrm>
             <a:custGeom>
               <a:avLst/>
               <a:pathLst>
-                <a:path w="7090630" h="2875071">
+                <a:path w="7090630" h="2920907">
                   <a:moveTo>
                     <a:pt x="0" y="0"/>
                   </a:moveTo>
                   <a:lnTo>
-                    <a:pt x="71622" y="87549"/>
-                  </a:lnTo>
-                  <a:lnTo>
-                    <a:pt x="143245" y="172581"/>
-                  </a:lnTo>
-                  <a:lnTo>
-                    <a:pt x="214867" y="255168"/>
-                  </a:lnTo>
-                  <a:lnTo>
-                    <a:pt x="286490" y="335379"/>
-                  </a:lnTo>
-                  <a:lnTo>
-                    <a:pt x="358112" y="413285"/>
-                  </a:lnTo>
-                  <a:lnTo>
-                    <a:pt x="429735" y="488949"/>
-                  </a:lnTo>
-                  <a:lnTo>
-                    <a:pt x="501357" y="562438"/>
-                  </a:lnTo>
-                  <a:lnTo>
-                    <a:pt x="572980" y="633814"/>
-                  </a:lnTo>
-                  <a:lnTo>
-                    <a:pt x="644602" y="703137"/>
-                  </a:lnTo>
-                  <a:lnTo>
-                    <a:pt x="716225" y="770467"/>
-                  </a:lnTo>
-                  <a:lnTo>
-                    <a:pt x="787847" y="835860"/>
-                  </a:lnTo>
-                  <a:lnTo>
-                    <a:pt x="859470" y="899374"/>
-                  </a:lnTo>
-                  <a:lnTo>
-                    <a:pt x="931092" y="961060"/>
-                  </a:lnTo>
-                  <a:lnTo>
-                    <a:pt x="1002715" y="1020973"/>
-                  </a:lnTo>
-                  <a:lnTo>
-                    <a:pt x="1074337" y="1079163"/>
-                  </a:lnTo>
-                  <a:lnTo>
-                    <a:pt x="1145960" y="1135679"/>
-                  </a:lnTo>
-                  <a:lnTo>
-                    <a:pt x="1217582" y="1190570"/>
-                  </a:lnTo>
-                  <a:lnTo>
-                    <a:pt x="1289205" y="1243883"/>
-                  </a:lnTo>
-                  <a:lnTo>
-                    <a:pt x="1360827" y="1295663"/>
-                  </a:lnTo>
-                  <a:lnTo>
-                    <a:pt x="1432450" y="1345954"/>
-                  </a:lnTo>
-                  <a:lnTo>
-                    <a:pt x="1504073" y="1394798"/>
-                  </a:lnTo>
-                  <a:lnTo>
-                    <a:pt x="1575695" y="1442238"/>
-                  </a:lnTo>
-                  <a:lnTo>
-                    <a:pt x="1647318" y="1488314"/>
-                  </a:lnTo>
-                  <a:lnTo>
-                    <a:pt x="1718940" y="1533064"/>
-                  </a:lnTo>
-                  <a:lnTo>
-                    <a:pt x="1790563" y="1576528"/>
-                  </a:lnTo>
-                  <a:lnTo>
-                    <a:pt x="1862185" y="1618742"/>
-                  </a:lnTo>
-                  <a:lnTo>
-                    <a:pt x="1933808" y="1659742"/>
-                  </a:lnTo>
-                  <a:lnTo>
-                    <a:pt x="2005430" y="1699563"/>
-                  </a:lnTo>
-                  <a:lnTo>
-                    <a:pt x="2077053" y="1738239"/>
-                  </a:lnTo>
-                  <a:lnTo>
-                    <a:pt x="2148675" y="1775803"/>
-                  </a:lnTo>
-                  <a:lnTo>
-                    <a:pt x="2220298" y="1812286"/>
-                  </a:lnTo>
-                  <a:lnTo>
-                    <a:pt x="2291920" y="1847721"/>
-                  </a:lnTo>
-                  <a:lnTo>
-                    <a:pt x="2363543" y="1882136"/>
-                  </a:lnTo>
-                  <a:lnTo>
-                    <a:pt x="2435165" y="1915562"/>
-                  </a:lnTo>
-                  <a:lnTo>
-                    <a:pt x="2506788" y="1948026"/>
-                  </a:lnTo>
-                  <a:lnTo>
-                    <a:pt x="2578410" y="1979557"/>
-                  </a:lnTo>
-                  <a:lnTo>
-                    <a:pt x="2650033" y="2010181"/>
-                  </a:lnTo>
-                  <a:lnTo>
-                    <a:pt x="2721655" y="2039925"/>
-                  </a:lnTo>
-                  <a:lnTo>
-                    <a:pt x="2793278" y="2068813"/>
-                  </a:lnTo>
-                  <a:lnTo>
-                    <a:pt x="2864901" y="2096871"/>
-                  </a:lnTo>
-                  <a:lnTo>
-                    <a:pt x="2936523" y="2124122"/>
-                  </a:lnTo>
-                  <a:lnTo>
-                    <a:pt x="3008146" y="2150589"/>
-                  </a:lnTo>
-                  <a:lnTo>
-                    <a:pt x="3079768" y="2176295"/>
-                  </a:lnTo>
-                  <a:lnTo>
-                    <a:pt x="3151391" y="2201261"/>
-                  </a:lnTo>
-                  <a:lnTo>
-                    <a:pt x="3223013" y="2212871"/>
-                  </a:lnTo>
-                  <a:lnTo>
-                    <a:pt x="3294636" y="2207866"/>
-                  </a:lnTo>
-                  <a:lnTo>
-                    <a:pt x="3366258" y="2202830"/>
-                  </a:lnTo>
-                  <a:lnTo>
-                    <a:pt x="3437881" y="2197765"/>
-                  </a:lnTo>
-                  <a:lnTo>
-                    <a:pt x="3509503" y="2192668"/>
-                  </a:lnTo>
-                  <a:lnTo>
-                    <a:pt x="3581126" y="2187541"/>
-                  </a:lnTo>
-                  <a:lnTo>
-                    <a:pt x="3652748" y="2182384"/>
-                  </a:lnTo>
-                  <a:lnTo>
-                    <a:pt x="3724371" y="2177195"/>
-                  </a:lnTo>
-                  <a:lnTo>
-                    <a:pt x="3795993" y="2171975"/>
-                  </a:lnTo>
-                  <a:lnTo>
-                    <a:pt x="3867616" y="2166723"/>
-                  </a:lnTo>
-                  <a:lnTo>
-                    <a:pt x="3939238" y="2161440"/>
-                  </a:lnTo>
-                  <a:lnTo>
-                    <a:pt x="4010861" y="2156125"/>
-                  </a:lnTo>
-                  <a:lnTo>
-                    <a:pt x="4082483" y="2150779"/>
-                  </a:lnTo>
-                  <a:lnTo>
-                    <a:pt x="4154106" y="2145400"/>
-                  </a:lnTo>
-                  <a:lnTo>
-                    <a:pt x="4225729" y="2139988"/>
-                  </a:lnTo>
-                  <a:lnTo>
-                    <a:pt x="4297351" y="2134544"/>
-                  </a:lnTo>
-                  <a:lnTo>
-                    <a:pt x="4368974" y="2129067"/>
-                  </a:lnTo>
-                  <a:lnTo>
-                    <a:pt x="4440596" y="2123558"/>
-                  </a:lnTo>
-                  <a:lnTo>
-                    <a:pt x="4512219" y="2118015"/>
-                  </a:lnTo>
-                  <a:lnTo>
-                    <a:pt x="4583841" y="2112439"/>
-                  </a:lnTo>
-                  <a:lnTo>
-                    <a:pt x="4655464" y="2106829"/>
-                  </a:lnTo>
-                  <a:lnTo>
-                    <a:pt x="4727086" y="2101185"/>
-                  </a:lnTo>
-                  <a:lnTo>
-                    <a:pt x="4798709" y="2095508"/>
-                  </a:lnTo>
-                  <a:lnTo>
-                    <a:pt x="4870331" y="2089796"/>
-                  </a:lnTo>
-                  <a:lnTo>
-                    <a:pt x="4941954" y="2084050"/>
-                  </a:lnTo>
-                  <a:lnTo>
-                    <a:pt x="5013576" y="2078269"/>
-                  </a:lnTo>
-                  <a:lnTo>
-                    <a:pt x="5085199" y="2072454"/>
-                  </a:lnTo>
-                  <a:lnTo>
-                    <a:pt x="5156821" y="2066604"/>
-                  </a:lnTo>
-                  <a:lnTo>
-                    <a:pt x="5228444" y="2060718"/>
-                  </a:lnTo>
-                  <a:lnTo>
-                    <a:pt x="5300066" y="2054797"/>
-                  </a:lnTo>
-                  <a:lnTo>
-                    <a:pt x="5371689" y="2048840"/>
-                  </a:lnTo>
-                  <a:lnTo>
-                    <a:pt x="5443311" y="2042848"/>
-                  </a:lnTo>
-                  <a:lnTo>
-                    <a:pt x="5514934" y="2036819"/>
-                  </a:lnTo>
-                  <a:lnTo>
-                    <a:pt x="5586557" y="2030754"/>
-                  </a:lnTo>
-                  <a:lnTo>
-                    <a:pt x="5658179" y="2024653"/>
-                  </a:lnTo>
-                  <a:lnTo>
-                    <a:pt x="5729802" y="2018514"/>
-                  </a:lnTo>
-                  <a:lnTo>
-                    <a:pt x="5801424" y="2012339"/>
-                  </a:lnTo>
-                  <a:lnTo>
-                    <a:pt x="5873047" y="2006127"/>
-                  </a:lnTo>
-                  <a:lnTo>
-                    <a:pt x="5944669" y="1999878"/>
-                  </a:lnTo>
-                  <a:lnTo>
-                    <a:pt x="6016292" y="1993590"/>
-                  </a:lnTo>
-                  <a:lnTo>
-                    <a:pt x="6087914" y="1987265"/>
-                  </a:lnTo>
-                  <a:lnTo>
-                    <a:pt x="6159537" y="1980902"/>
-                  </a:lnTo>
-                  <a:lnTo>
-                    <a:pt x="6231159" y="1974501"/>
-                  </a:lnTo>
-                  <a:lnTo>
-                    <a:pt x="6302782" y="1968061"/>
-                  </a:lnTo>
-                  <a:lnTo>
-                    <a:pt x="6374404" y="1961582"/>
-                  </a:lnTo>
-                  <a:lnTo>
-                    <a:pt x="6446027" y="1955064"/>
-                  </a:lnTo>
-                  <a:lnTo>
-                    <a:pt x="6517649" y="1948507"/>
-                  </a:lnTo>
-                  <a:lnTo>
-                    <a:pt x="6589272" y="1941911"/>
-                  </a:lnTo>
-                  <a:lnTo>
-                    <a:pt x="6660894" y="1935275"/>
-                  </a:lnTo>
-                  <a:lnTo>
-                    <a:pt x="6732517" y="1928599"/>
-                  </a:lnTo>
-                  <a:lnTo>
-                    <a:pt x="6804139" y="1921882"/>
-                  </a:lnTo>
-                  <a:lnTo>
-                    <a:pt x="6875762" y="1915126"/>
-                  </a:lnTo>
-                  <a:lnTo>
-                    <a:pt x="6947385" y="1908328"/>
-                  </a:lnTo>
-                  <a:lnTo>
-                    <a:pt x="7019007" y="1901490"/>
-                  </a:lnTo>
-                  <a:lnTo>
-                    <a:pt x="7090630" y="1894611"/>
-                  </a:lnTo>
-                  <a:lnTo>
-                    <a:pt x="7090630" y="2875071"/>
-                  </a:lnTo>
-                  <a:lnTo>
-                    <a:pt x="7019007" y="2870055"/>
-                  </a:lnTo>
-                  <a:lnTo>
-                    <a:pt x="6947385" y="2864890"/>
-                  </a:lnTo>
-                  <a:lnTo>
-                    <a:pt x="6875762" y="2859572"/>
-                  </a:lnTo>
-                  <a:lnTo>
-                    <a:pt x="6804139" y="2854096"/>
-                  </a:lnTo>
-                  <a:lnTo>
-                    <a:pt x="6732517" y="2848458"/>
-                  </a:lnTo>
-                  <a:lnTo>
-                    <a:pt x="6660894" y="2842654"/>
-                  </a:lnTo>
-                  <a:lnTo>
-                    <a:pt x="6589272" y="2836678"/>
-                  </a:lnTo>
-                  <a:lnTo>
-                    <a:pt x="6517649" y="2830524"/>
-                  </a:lnTo>
-                  <a:lnTo>
-                    <a:pt x="6446027" y="2824189"/>
-                  </a:lnTo>
-                  <a:lnTo>
-                    <a:pt x="6374404" y="2817666"/>
-                  </a:lnTo>
-                  <a:lnTo>
-                    <a:pt x="6302782" y="2810949"/>
-                  </a:lnTo>
-                  <a:lnTo>
-                    <a:pt x="6231159" y="2804034"/>
-                  </a:lnTo>
-                  <a:lnTo>
-                    <a:pt x="6159537" y="2796914"/>
-                  </a:lnTo>
-                  <a:lnTo>
-                    <a:pt x="6087914" y="2789584"/>
-                  </a:lnTo>
-                  <a:lnTo>
-                    <a:pt x="6016292" y="2782036"/>
-                  </a:lnTo>
-                  <a:lnTo>
-                    <a:pt x="5944669" y="2774265"/>
-                  </a:lnTo>
-                  <a:lnTo>
-                    <a:pt x="5873047" y="2766264"/>
-                  </a:lnTo>
-                  <a:lnTo>
-                    <a:pt x="5801424" y="2758026"/>
-                  </a:lnTo>
-                  <a:lnTo>
-                    <a:pt x="5729802" y="2749544"/>
-                  </a:lnTo>
-                  <a:lnTo>
-                    <a:pt x="5658179" y="2740810"/>
-                  </a:lnTo>
-                  <a:lnTo>
-                    <a:pt x="5586557" y="2731819"/>
-                  </a:lnTo>
-                  <a:lnTo>
-                    <a:pt x="5514934" y="2722561"/>
-                  </a:lnTo>
-                  <a:lnTo>
-                    <a:pt x="5443311" y="2713029"/>
-                  </a:lnTo>
-                  <a:lnTo>
-                    <a:pt x="5371689" y="2703214"/>
-                  </a:lnTo>
-                  <a:lnTo>
-                    <a:pt x="5300066" y="2693109"/>
-                  </a:lnTo>
-                  <a:lnTo>
-                    <a:pt x="5228444" y="2682705"/>
-                  </a:lnTo>
-                  <a:lnTo>
-                    <a:pt x="5156821" y="2671993"/>
-                  </a:lnTo>
-                  <a:lnTo>
-                    <a:pt x="5085199" y="2660964"/>
-                  </a:lnTo>
-                  <a:lnTo>
-                    <a:pt x="5013576" y="2649608"/>
-                  </a:lnTo>
-                  <a:lnTo>
-                    <a:pt x="4941954" y="2637916"/>
-                  </a:lnTo>
-                  <a:lnTo>
-                    <a:pt x="4870331" y="2625877"/>
-                  </a:lnTo>
-                  <a:lnTo>
-                    <a:pt x="4798709" y="2613483"/>
-                  </a:lnTo>
-                  <a:lnTo>
-                    <a:pt x="4727086" y="2600721"/>
-                  </a:lnTo>
-                  <a:lnTo>
-                    <a:pt x="4655464" y="2587582"/>
-                  </a:lnTo>
-                  <a:lnTo>
-                    <a:pt x="4583841" y="2574053"/>
-                  </a:lnTo>
-                  <a:lnTo>
-                    <a:pt x="4512219" y="2560124"/>
-                  </a:lnTo>
-                  <a:lnTo>
-                    <a:pt x="4440596" y="2545782"/>
-                  </a:lnTo>
-                  <a:lnTo>
-                    <a:pt x="4368974" y="2531016"/>
-                  </a:lnTo>
-                  <a:lnTo>
-                    <a:pt x="4297351" y="2515813"/>
-                  </a:lnTo>
-                  <a:lnTo>
-                    <a:pt x="4225729" y="2500159"/>
-                  </a:lnTo>
-                  <a:lnTo>
-                    <a:pt x="4154106" y="2484042"/>
-                  </a:lnTo>
-                  <a:lnTo>
-                    <a:pt x="4082483" y="2467448"/>
-                  </a:lnTo>
-                  <a:lnTo>
-                    <a:pt x="4010861" y="2450363"/>
-                  </a:lnTo>
-                  <a:lnTo>
-                    <a:pt x="3939238" y="2432771"/>
-                  </a:lnTo>
-                  <a:lnTo>
-                    <a:pt x="3867616" y="2414659"/>
-                  </a:lnTo>
-                  <a:lnTo>
-                    <a:pt x="3795993" y="2396011"/>
-                  </a:lnTo>
-                  <a:lnTo>
-                    <a:pt x="3724371" y="2376810"/>
-                  </a:lnTo>
-                  <a:lnTo>
-                    <a:pt x="3652748" y="2357041"/>
-                  </a:lnTo>
-                  <a:lnTo>
-                    <a:pt x="3581126" y="2336687"/>
-                  </a:lnTo>
-                  <a:lnTo>
-                    <a:pt x="3509503" y="2315730"/>
-                  </a:lnTo>
-                  <a:lnTo>
-                    <a:pt x="3437881" y="2294152"/>
-                  </a:lnTo>
-                  <a:lnTo>
-                    <a:pt x="3366258" y="2271936"/>
-                  </a:lnTo>
-                  <a:lnTo>
-                    <a:pt x="3294636" y="2249061"/>
-                  </a:lnTo>
-                  <a:lnTo>
-                    <a:pt x="3223013" y="2225510"/>
-                  </a:lnTo>
-                  <a:lnTo>
-                    <a:pt x="3151391" y="2217846"/>
-                  </a:lnTo>
-                  <a:lnTo>
-                    <a:pt x="3079768" y="2222792"/>
-                  </a:lnTo>
-                  <a:lnTo>
-                    <a:pt x="3008146" y="2227708"/>
-                  </a:lnTo>
-                  <a:lnTo>
-                    <a:pt x="2936523" y="2232595"/>
-                  </a:lnTo>
-                  <a:lnTo>
-                    <a:pt x="2864901" y="2237452"/>
-                  </a:lnTo>
-                  <a:lnTo>
-                    <a:pt x="2793278" y="2242280"/>
-                  </a:lnTo>
-                  <a:lnTo>
-                    <a:pt x="2721655" y="2247080"/>
-                  </a:lnTo>
-                  <a:lnTo>
-                    <a:pt x="2650033" y="2251850"/>
-                  </a:lnTo>
-                  <a:lnTo>
-                    <a:pt x="2578410" y="2256593"/>
-                  </a:lnTo>
-                  <a:lnTo>
-                    <a:pt x="2506788" y="2261306"/>
-                  </a:lnTo>
-                  <a:lnTo>
-                    <a:pt x="2435165" y="2265992"/>
-                  </a:lnTo>
-                  <a:lnTo>
-                    <a:pt x="2363543" y="2270650"/>
-                  </a:lnTo>
-                  <a:lnTo>
-                    <a:pt x="2291920" y="2275279"/>
-                  </a:lnTo>
-                  <a:lnTo>
-                    <a:pt x="2220298" y="2279881"/>
-                  </a:lnTo>
-                  <a:lnTo>
-                    <a:pt x="2148675" y="2284456"/>
-                  </a:lnTo>
-                  <a:lnTo>
-                    <a:pt x="2077053" y="2289003"/>
-                  </a:lnTo>
-                  <a:lnTo>
-                    <a:pt x="2005430" y="2293523"/>
-                  </a:lnTo>
-                  <a:lnTo>
-                    <a:pt x="1933808" y="2298016"/>
-                  </a:lnTo>
-                  <a:lnTo>
-                    <a:pt x="1862185" y="2302482"/>
-                  </a:lnTo>
-                  <a:lnTo>
-                    <a:pt x="1790563" y="2306921"/>
-                  </a:lnTo>
-                  <a:lnTo>
-                    <a:pt x="1718940" y="2311334"/>
-                  </a:lnTo>
-                  <a:lnTo>
-                    <a:pt x="1647318" y="2315720"/>
-                  </a:lnTo>
-                  <a:lnTo>
-                    <a:pt x="1575695" y="2320080"/>
-                  </a:lnTo>
-                  <a:lnTo>
-                    <a:pt x="1504073" y="2324414"/>
-                  </a:lnTo>
-                  <a:lnTo>
-                    <a:pt x="1432450" y="2328722"/>
-                  </a:lnTo>
-                  <a:lnTo>
-                    <a:pt x="1360827" y="2333004"/>
-                  </a:lnTo>
-                  <a:lnTo>
-                    <a:pt x="1289205" y="2337261"/>
-                  </a:lnTo>
-                  <a:lnTo>
-                    <a:pt x="1217582" y="2341492"/>
-                  </a:lnTo>
-                  <a:lnTo>
-                    <a:pt x="1145960" y="2345698"/>
-                  </a:lnTo>
-                  <a:lnTo>
-                    <a:pt x="1074337" y="2349879"/>
-                  </a:lnTo>
-                  <a:lnTo>
-                    <a:pt x="1002715" y="2354034"/>
-                  </a:lnTo>
-                  <a:lnTo>
-                    <a:pt x="931092" y="2358165"/>
-                  </a:lnTo>
-                  <a:lnTo>
-                    <a:pt x="859470" y="2362271"/>
-                  </a:lnTo>
-                  <a:lnTo>
-                    <a:pt x="787847" y="2366353"/>
-                  </a:lnTo>
-                  <a:lnTo>
-                    <a:pt x="716225" y="2370410"/>
-                  </a:lnTo>
-                  <a:lnTo>
-                    <a:pt x="644602" y="2374443"/>
-                  </a:lnTo>
-                  <a:lnTo>
-                    <a:pt x="572980" y="2378452"/>
-                  </a:lnTo>
-                  <a:lnTo>
-                    <a:pt x="501357" y="2382436"/>
-                  </a:lnTo>
-                  <a:lnTo>
-                    <a:pt x="429735" y="2386397"/>
-                  </a:lnTo>
-                  <a:lnTo>
-                    <a:pt x="358112" y="2390334"/>
-                  </a:lnTo>
-                  <a:lnTo>
-                    <a:pt x="286490" y="2394248"/>
-                  </a:lnTo>
-                  <a:lnTo>
-                    <a:pt x="214867" y="2398138"/>
-                  </a:lnTo>
-                  <a:lnTo>
-                    <a:pt x="143245" y="2402005"/>
-                  </a:lnTo>
-                  <a:lnTo>
-                    <a:pt x="71622" y="2405849"/>
-                  </a:lnTo>
-                  <a:lnTo>
-                    <a:pt x="0" y="2409670"/>
+                    <a:pt x="71622" y="89639"/>
+                  </a:lnTo>
+                  <a:lnTo>
+                    <a:pt x="143245" y="176677"/>
+                  </a:lnTo>
+                  <a:lnTo>
+                    <a:pt x="214867" y="261188"/>
+                  </a:lnTo>
+                  <a:lnTo>
+                    <a:pt x="286490" y="343247"/>
+                  </a:lnTo>
+                  <a:lnTo>
+                    <a:pt x="358112" y="422923"/>
+                  </a:lnTo>
+                  <a:lnTo>
+                    <a:pt x="429735" y="500286"/>
+                  </a:lnTo>
+                  <a:lnTo>
+                    <a:pt x="501357" y="575404"/>
+                  </a:lnTo>
+                  <a:lnTo>
+                    <a:pt x="572980" y="648341"/>
+                  </a:lnTo>
+                  <a:lnTo>
+                    <a:pt x="644602" y="719161"/>
+                  </a:lnTo>
+                  <a:lnTo>
+                    <a:pt x="716225" y="787925"/>
+                  </a:lnTo>
+                  <a:lnTo>
+                    <a:pt x="787847" y="854693"/>
+                  </a:lnTo>
+                  <a:lnTo>
+                    <a:pt x="859470" y="919523"/>
+                  </a:lnTo>
+                  <a:lnTo>
+                    <a:pt x="931092" y="982472"/>
+                  </a:lnTo>
+                  <a:lnTo>
+                    <a:pt x="1002715" y="1043593"/>
+                  </a:lnTo>
+                  <a:lnTo>
+                    <a:pt x="1074337" y="1102939"/>
+                  </a:lnTo>
+                  <a:lnTo>
+                    <a:pt x="1145960" y="1160563"/>
+                  </a:lnTo>
+                  <a:lnTo>
+                    <a:pt x="1217582" y="1216515"/>
+                  </a:lnTo>
+                  <a:lnTo>
+                    <a:pt x="1289205" y="1270842"/>
+                  </a:lnTo>
+                  <a:lnTo>
+                    <a:pt x="1360827" y="1323592"/>
+                  </a:lnTo>
+                  <a:lnTo>
+                    <a:pt x="1432450" y="1374811"/>
+                  </a:lnTo>
+                  <a:lnTo>
+                    <a:pt x="1504073" y="1424543"/>
+                  </a:lnTo>
+                  <a:lnTo>
+                    <a:pt x="1575695" y="1472832"/>
+                  </a:lnTo>
+                  <a:lnTo>
+                    <a:pt x="1647318" y="1519719"/>
+                  </a:lnTo>
+                  <a:lnTo>
+                    <a:pt x="1718940" y="1565245"/>
+                  </a:lnTo>
+                  <a:lnTo>
+                    <a:pt x="1790563" y="1609449"/>
+                  </a:lnTo>
+                  <a:lnTo>
+                    <a:pt x="1862185" y="1652370"/>
+                  </a:lnTo>
+                  <a:lnTo>
+                    <a:pt x="1933808" y="1694046"/>
+                  </a:lnTo>
+                  <a:lnTo>
+                    <a:pt x="2005430" y="1734511"/>
+                  </a:lnTo>
+                  <a:lnTo>
+                    <a:pt x="2077053" y="1773802"/>
+                  </a:lnTo>
+                  <a:lnTo>
+                    <a:pt x="2148675" y="1811953"/>
+                  </a:lnTo>
+                  <a:lnTo>
+                    <a:pt x="2220298" y="1848996"/>
+                  </a:lnTo>
+                  <a:lnTo>
+                    <a:pt x="2291920" y="1884964"/>
+                  </a:lnTo>
+                  <a:lnTo>
+                    <a:pt x="2363543" y="1919887"/>
+                  </a:lnTo>
+                  <a:lnTo>
+                    <a:pt x="2435165" y="1953797"/>
+                  </a:lnTo>
+                  <a:lnTo>
+                    <a:pt x="2506788" y="1986723"/>
+                  </a:lnTo>
+                  <a:lnTo>
+                    <a:pt x="2578410" y="2018693"/>
+                  </a:lnTo>
+                  <a:lnTo>
+                    <a:pt x="2650033" y="2049734"/>
+                  </a:lnTo>
+                  <a:lnTo>
+                    <a:pt x="2721655" y="2079875"/>
+                  </a:lnTo>
+                  <a:lnTo>
+                    <a:pt x="2793278" y="2109141"/>
+                  </a:lnTo>
+                  <a:lnTo>
+                    <a:pt x="2864901" y="2137557"/>
+                  </a:lnTo>
+                  <a:lnTo>
+                    <a:pt x="2936523" y="2165149"/>
+                  </a:lnTo>
+                  <a:lnTo>
+                    <a:pt x="3008146" y="2191939"/>
+                  </a:lnTo>
+                  <a:lnTo>
+                    <a:pt x="3079768" y="2217952"/>
+                  </a:lnTo>
+                  <a:lnTo>
+                    <a:pt x="3151391" y="2243210"/>
+                  </a:lnTo>
+                  <a:lnTo>
+                    <a:pt x="3223013" y="2257039"/>
+                  </a:lnTo>
+                  <a:lnTo>
+                    <a:pt x="3294636" y="2252820"/>
+                  </a:lnTo>
+                  <a:lnTo>
+                    <a:pt x="3366258" y="2248581"/>
+                  </a:lnTo>
+                  <a:lnTo>
+                    <a:pt x="3437881" y="2244319"/>
+                  </a:lnTo>
+                  <a:lnTo>
+                    <a:pt x="3509503" y="2240036"/>
+                  </a:lnTo>
+                  <a:lnTo>
+                    <a:pt x="3581126" y="2235732"/>
+                  </a:lnTo>
+                  <a:lnTo>
+                    <a:pt x="3652748" y="2231405"/>
+                  </a:lnTo>
+                  <a:lnTo>
+                    <a:pt x="3724371" y="2227057"/>
+                  </a:lnTo>
+                  <a:lnTo>
+                    <a:pt x="3795993" y="2222686"/>
+                  </a:lnTo>
+                  <a:lnTo>
+                    <a:pt x="3867616" y="2218294"/>
+                  </a:lnTo>
+                  <a:lnTo>
+                    <a:pt x="3939238" y="2213879"/>
+                  </a:lnTo>
+                  <a:lnTo>
+                    <a:pt x="4010861" y="2209441"/>
+                  </a:lnTo>
+                  <a:lnTo>
+                    <a:pt x="4082483" y="2204981"/>
+                  </a:lnTo>
+                  <a:lnTo>
+                    <a:pt x="4154106" y="2200499"/>
+                  </a:lnTo>
+                  <a:lnTo>
+                    <a:pt x="4225729" y="2195993"/>
+                  </a:lnTo>
+                  <a:lnTo>
+                    <a:pt x="4297351" y="2191465"/>
+                  </a:lnTo>
+                  <a:lnTo>
+                    <a:pt x="4368974" y="2186914"/>
+                  </a:lnTo>
+                  <a:lnTo>
+                    <a:pt x="4440596" y="2182340"/>
+                  </a:lnTo>
+                  <a:lnTo>
+                    <a:pt x="4512219" y="2177742"/>
+                  </a:lnTo>
+                  <a:lnTo>
+                    <a:pt x="4583841" y="2173121"/>
+                  </a:lnTo>
+                  <a:lnTo>
+                    <a:pt x="4655464" y="2168477"/>
+                  </a:lnTo>
+                  <a:lnTo>
+                    <a:pt x="4727086" y="2163809"/>
+                  </a:lnTo>
+                  <a:lnTo>
+                    <a:pt x="4798709" y="2159117"/>
+                  </a:lnTo>
+                  <a:lnTo>
+                    <a:pt x="4870331" y="2154402"/>
+                  </a:lnTo>
+                  <a:lnTo>
+                    <a:pt x="4941954" y="2149663"/>
+                  </a:lnTo>
+                  <a:lnTo>
+                    <a:pt x="5013576" y="2144899"/>
+                  </a:lnTo>
+                  <a:lnTo>
+                    <a:pt x="5085199" y="2140112"/>
+                  </a:lnTo>
+                  <a:lnTo>
+                    <a:pt x="5156821" y="2135300"/>
+                  </a:lnTo>
+                  <a:lnTo>
+                    <a:pt x="5228444" y="2130464"/>
+                  </a:lnTo>
+                  <a:lnTo>
+                    <a:pt x="5300066" y="2125603"/>
+                  </a:lnTo>
+                  <a:lnTo>
+                    <a:pt x="5371689" y="2120717"/>
+                  </a:lnTo>
+                  <a:lnTo>
+                    <a:pt x="5443311" y="2115807"/>
+                  </a:lnTo>
+                  <a:lnTo>
+                    <a:pt x="5514934" y="2110872"/>
+                  </a:lnTo>
+                  <a:lnTo>
+                    <a:pt x="5586557" y="2105912"/>
+                  </a:lnTo>
+                  <a:lnTo>
+                    <a:pt x="5658179" y="2100926"/>
+                  </a:lnTo>
+                  <a:lnTo>
+                    <a:pt x="5729802" y="2095915"/>
+                  </a:lnTo>
+                  <a:lnTo>
+                    <a:pt x="5801424" y="2090879"/>
+                  </a:lnTo>
+                  <a:lnTo>
+                    <a:pt x="5873047" y="2085817"/>
+                  </a:lnTo>
+                  <a:lnTo>
+                    <a:pt x="5944669" y="2080730"/>
+                  </a:lnTo>
+                  <a:lnTo>
+                    <a:pt x="6016292" y="2075617"/>
+                  </a:lnTo>
+                  <a:lnTo>
+                    <a:pt x="6087914" y="2070477"/>
+                  </a:lnTo>
+                  <a:lnTo>
+                    <a:pt x="6159537" y="2065312"/>
+                  </a:lnTo>
+                  <a:lnTo>
+                    <a:pt x="6231159" y="2060121"/>
+                  </a:lnTo>
+                  <a:lnTo>
+                    <a:pt x="6302782" y="2054903"/>
+                  </a:lnTo>
+                  <a:lnTo>
+                    <a:pt x="6374404" y="2049658"/>
+                  </a:lnTo>
+                  <a:lnTo>
+                    <a:pt x="6446027" y="2044387"/>
+                  </a:lnTo>
+                  <a:lnTo>
+                    <a:pt x="6517649" y="2039090"/>
+                  </a:lnTo>
+                  <a:lnTo>
+                    <a:pt x="6589272" y="2033765"/>
+                  </a:lnTo>
+                  <a:lnTo>
+                    <a:pt x="6660894" y="2028413"/>
+                  </a:lnTo>
+                  <a:lnTo>
+                    <a:pt x="6732517" y="2023034"/>
+                  </a:lnTo>
+                  <a:lnTo>
+                    <a:pt x="6804139" y="2017628"/>
+                  </a:lnTo>
+                  <a:lnTo>
+                    <a:pt x="6875762" y="2012195"/>
+                  </a:lnTo>
+                  <a:lnTo>
+                    <a:pt x="6947385" y="2006734"/>
+                  </a:lnTo>
+                  <a:lnTo>
+                    <a:pt x="7019007" y="2001245"/>
+                  </a:lnTo>
+                  <a:lnTo>
+                    <a:pt x="7090630" y="1995728"/>
+                  </a:lnTo>
+                  <a:lnTo>
+                    <a:pt x="7090630" y="2920907"/>
+                  </a:lnTo>
+                  <a:lnTo>
+                    <a:pt x="7019007" y="2915909"/>
+                  </a:lnTo>
+                  <a:lnTo>
+                    <a:pt x="6947385" y="2910762"/>
+                  </a:lnTo>
+                  <a:lnTo>
+                    <a:pt x="6875762" y="2905461"/>
+                  </a:lnTo>
+                  <a:lnTo>
+                    <a:pt x="6804139" y="2900001"/>
+                  </a:lnTo>
+                  <a:lnTo>
+                    <a:pt x="6732517" y="2894379"/>
+                  </a:lnTo>
+                  <a:lnTo>
+                    <a:pt x="6660894" y="2888588"/>
+                  </a:lnTo>
+                  <a:lnTo>
+                    <a:pt x="6589272" y="2882624"/>
+                  </a:lnTo>
+                  <a:lnTo>
+                    <a:pt x="6517649" y="2876482"/>
+                  </a:lnTo>
+                  <a:lnTo>
+                    <a:pt x="6446027" y="2870156"/>
+                  </a:lnTo>
+                  <a:lnTo>
+                    <a:pt x="6374404" y="2863641"/>
+                  </a:lnTo>
+                  <a:lnTo>
+                    <a:pt x="6302782" y="2856931"/>
+                  </a:lnTo>
+                  <a:lnTo>
+                    <a:pt x="6231159" y="2850021"/>
+                  </a:lnTo>
+                  <a:lnTo>
+                    <a:pt x="6159537" y="2842904"/>
+                  </a:lnTo>
+                  <a:lnTo>
+                    <a:pt x="6087914" y="2835575"/>
+                  </a:lnTo>
+                  <a:lnTo>
+                    <a:pt x="6016292" y="2828026"/>
+                  </a:lnTo>
+                  <a:lnTo>
+                    <a:pt x="5944669" y="2820251"/>
+                  </a:lnTo>
+                  <a:lnTo>
+                    <a:pt x="5873047" y="2812244"/>
+                  </a:lnTo>
+                  <a:lnTo>
+                    <a:pt x="5801424" y="2803998"/>
+                  </a:lnTo>
+                  <a:lnTo>
+                    <a:pt x="5729802" y="2795505"/>
+                  </a:lnTo>
+                  <a:lnTo>
+                    <a:pt x="5658179" y="2786759"/>
+                  </a:lnTo>
+                  <a:lnTo>
+                    <a:pt x="5586557" y="2777751"/>
+                  </a:lnTo>
+                  <a:lnTo>
+                    <a:pt x="5514934" y="2768473"/>
+                  </a:lnTo>
+                  <a:lnTo>
+                    <a:pt x="5443311" y="2758918"/>
+                  </a:lnTo>
+                  <a:lnTo>
+                    <a:pt x="5371689" y="2749078"/>
+                  </a:lnTo>
+                  <a:lnTo>
+                    <a:pt x="5300066" y="2738943"/>
+                  </a:lnTo>
+                  <a:lnTo>
+                    <a:pt x="5228444" y="2728506"/>
+                  </a:lnTo>
+                  <a:lnTo>
+                    <a:pt x="5156821" y="2717756"/>
+                  </a:lnTo>
+                  <a:lnTo>
+                    <a:pt x="5085199" y="2706685"/>
+                  </a:lnTo>
+                  <a:lnTo>
+                    <a:pt x="5013576" y="2695283"/>
+                  </a:lnTo>
+                  <a:lnTo>
+                    <a:pt x="4941954" y="2683540"/>
+                  </a:lnTo>
+                  <a:lnTo>
+                    <a:pt x="4870331" y="2671446"/>
+                  </a:lnTo>
+                  <a:lnTo>
+                    <a:pt x="4798709" y="2658991"/>
+                  </a:lnTo>
+                  <a:lnTo>
+                    <a:pt x="4727086" y="2646163"/>
+                  </a:lnTo>
+                  <a:lnTo>
+                    <a:pt x="4655464" y="2632952"/>
+                  </a:lnTo>
+                  <a:lnTo>
+                    <a:pt x="4583841" y="2619346"/>
+                  </a:lnTo>
+                  <a:lnTo>
+                    <a:pt x="4512219" y="2605333"/>
+                  </a:lnTo>
+                  <a:lnTo>
+                    <a:pt x="4440596" y="2590901"/>
+                  </a:lnTo>
+                  <a:lnTo>
+                    <a:pt x="4368974" y="2576037"/>
+                  </a:lnTo>
+                  <a:lnTo>
+                    <a:pt x="4297351" y="2560729"/>
+                  </a:lnTo>
+                  <a:lnTo>
+                    <a:pt x="4225729" y="2544964"/>
+                  </a:lnTo>
+                  <a:lnTo>
+                    <a:pt x="4154106" y="2528727"/>
+                  </a:lnTo>
+                  <a:lnTo>
+                    <a:pt x="4082483" y="2512005"/>
+                  </a:lnTo>
+                  <a:lnTo>
+                    <a:pt x="4010861" y="2494783"/>
+                  </a:lnTo>
+                  <a:lnTo>
+                    <a:pt x="3939238" y="2477046"/>
+                  </a:lnTo>
+                  <a:lnTo>
+                    <a:pt x="3867616" y="2458779"/>
+                  </a:lnTo>
+                  <a:lnTo>
+                    <a:pt x="3795993" y="2439966"/>
+                  </a:lnTo>
+                  <a:lnTo>
+                    <a:pt x="3724371" y="2420590"/>
+                  </a:lnTo>
+                  <a:lnTo>
+                    <a:pt x="3652748" y="2400635"/>
+                  </a:lnTo>
+                  <a:lnTo>
+                    <a:pt x="3581126" y="2380084"/>
+                  </a:lnTo>
+                  <a:lnTo>
+                    <a:pt x="3509503" y="2358918"/>
+                  </a:lnTo>
+                  <a:lnTo>
+                    <a:pt x="3437881" y="2337119"/>
+                  </a:lnTo>
+                  <a:lnTo>
+                    <a:pt x="3366258" y="2314669"/>
+                  </a:lnTo>
+                  <a:lnTo>
+                    <a:pt x="3294636" y="2291547"/>
+                  </a:lnTo>
+                  <a:lnTo>
+                    <a:pt x="3223013" y="2267735"/>
+                  </a:lnTo>
+                  <a:lnTo>
+                    <a:pt x="3151391" y="2261236"/>
+                  </a:lnTo>
+                  <a:lnTo>
+                    <a:pt x="3079768" y="2265411"/>
+                  </a:lnTo>
+                  <a:lnTo>
+                    <a:pt x="3008146" y="2269566"/>
+                  </a:lnTo>
+                  <a:lnTo>
+                    <a:pt x="2936523" y="2273700"/>
+                  </a:lnTo>
+                  <a:lnTo>
+                    <a:pt x="2864901" y="2277813"/>
+                  </a:lnTo>
+                  <a:lnTo>
+                    <a:pt x="2793278" y="2281905"/>
+                  </a:lnTo>
+                  <a:lnTo>
+                    <a:pt x="2721655" y="2285976"/>
+                  </a:lnTo>
+                  <a:lnTo>
+                    <a:pt x="2650033" y="2290027"/>
+                  </a:lnTo>
+                  <a:lnTo>
+                    <a:pt x="2578410" y="2294058"/>
+                  </a:lnTo>
+                  <a:lnTo>
+                    <a:pt x="2506788" y="2298068"/>
+                  </a:lnTo>
+                  <a:lnTo>
+                    <a:pt x="2435165" y="2302058"/>
+                  </a:lnTo>
+                  <a:lnTo>
+                    <a:pt x="2363543" y="2306027"/>
+                  </a:lnTo>
+                  <a:lnTo>
+                    <a:pt x="2291920" y="2309977"/>
+                  </a:lnTo>
+                  <a:lnTo>
+                    <a:pt x="2220298" y="2313907"/>
+                  </a:lnTo>
+                  <a:lnTo>
+                    <a:pt x="2148675" y="2317816"/>
+                  </a:lnTo>
+                  <a:lnTo>
+                    <a:pt x="2077053" y="2321707"/>
+                  </a:lnTo>
+                  <a:lnTo>
+                    <a:pt x="2005430" y="2325577"/>
+                  </a:lnTo>
+                  <a:lnTo>
+                    <a:pt x="1933808" y="2329428"/>
+                  </a:lnTo>
+                  <a:lnTo>
+                    <a:pt x="1862185" y="2333259"/>
+                  </a:lnTo>
+                  <a:lnTo>
+                    <a:pt x="1790563" y="2337071"/>
+                  </a:lnTo>
+                  <a:lnTo>
+                    <a:pt x="1718940" y="2340864"/>
+                  </a:lnTo>
+                  <a:lnTo>
+                    <a:pt x="1647318" y="2344638"/>
+                  </a:lnTo>
+                  <a:lnTo>
+                    <a:pt x="1575695" y="2348393"/>
+                  </a:lnTo>
+                  <a:lnTo>
+                    <a:pt x="1504073" y="2352128"/>
+                  </a:lnTo>
+                  <a:lnTo>
+                    <a:pt x="1432450" y="2355845"/>
+                  </a:lnTo>
+                  <a:lnTo>
+                    <a:pt x="1360827" y="2359543"/>
+                  </a:lnTo>
+                  <a:lnTo>
+                    <a:pt x="1289205" y="2363222"/>
+                  </a:lnTo>
+                  <a:lnTo>
+                    <a:pt x="1217582" y="2366883"/>
+                  </a:lnTo>
+                  <a:lnTo>
+                    <a:pt x="1145960" y="2370525"/>
+                  </a:lnTo>
+                  <a:lnTo>
+                    <a:pt x="1074337" y="2374149"/>
+                  </a:lnTo>
+                  <a:lnTo>
+                    <a:pt x="1002715" y="2377755"/>
+                  </a:lnTo>
+                  <a:lnTo>
+                    <a:pt x="931092" y="2381342"/>
+                  </a:lnTo>
+                  <a:lnTo>
+                    <a:pt x="859470" y="2384912"/>
+                  </a:lnTo>
+                  <a:lnTo>
+                    <a:pt x="787847" y="2388463"/>
+                  </a:lnTo>
+                  <a:lnTo>
+                    <a:pt x="716225" y="2391996"/>
+                  </a:lnTo>
+                  <a:lnTo>
+                    <a:pt x="644602" y="2395512"/>
+                  </a:lnTo>
+                  <a:lnTo>
+                    <a:pt x="572980" y="2399009"/>
+                  </a:lnTo>
+                  <a:lnTo>
+                    <a:pt x="501357" y="2402489"/>
+                  </a:lnTo>
+                  <a:lnTo>
+                    <a:pt x="429735" y="2405952"/>
+                  </a:lnTo>
+                  <a:lnTo>
+                    <a:pt x="358112" y="2409397"/>
+                  </a:lnTo>
+                  <a:lnTo>
+                    <a:pt x="286490" y="2412824"/>
+                  </a:lnTo>
+                  <a:lnTo>
+                    <a:pt x="214867" y="2416235"/>
+                  </a:lnTo>
+                  <a:lnTo>
+                    <a:pt x="143245" y="2419628"/>
+                  </a:lnTo>
+                  <a:lnTo>
+                    <a:pt x="71622" y="2423003"/>
+                  </a:lnTo>
+                  <a:lnTo>
+                    <a:pt x="0" y="2426362"/>
                   </a:lnTo>
                   <a:close/>
                 </a:path>
@@ -3633,312 +3633,312 @@
           </p:nvSpPr>
           <p:spPr>
             <a:xfrm>
-              <a:off x="1172049" y="2512745"/>
-              <a:ext cx="7090630" cy="2212871"/>
+              <a:off x="1172049" y="2469169"/>
+              <a:ext cx="7090630" cy="2257039"/>
             </a:xfrm>
             <a:custGeom>
               <a:avLst/>
               <a:pathLst>
-                <a:path w="7090630" h="2212871">
+                <a:path w="7090630" h="2257039">
                   <a:moveTo>
                     <a:pt x="0" y="0"/>
                   </a:moveTo>
                   <a:lnTo>
-                    <a:pt x="71622" y="87549"/>
-                  </a:lnTo>
-                  <a:lnTo>
-                    <a:pt x="143245" y="172581"/>
-                  </a:lnTo>
-                  <a:lnTo>
-                    <a:pt x="214867" y="255168"/>
-                  </a:lnTo>
-                  <a:lnTo>
-                    <a:pt x="286490" y="335379"/>
-                  </a:lnTo>
-                  <a:lnTo>
-                    <a:pt x="358112" y="413285"/>
-                  </a:lnTo>
-                  <a:lnTo>
-                    <a:pt x="429735" y="488949"/>
-                  </a:lnTo>
-                  <a:lnTo>
-                    <a:pt x="501357" y="562438"/>
-                  </a:lnTo>
-                  <a:lnTo>
-                    <a:pt x="572980" y="633814"/>
-                  </a:lnTo>
-                  <a:lnTo>
-                    <a:pt x="644602" y="703137"/>
-                  </a:lnTo>
-                  <a:lnTo>
-                    <a:pt x="716225" y="770467"/>
-                  </a:lnTo>
-                  <a:lnTo>
-                    <a:pt x="787847" y="835860"/>
-                  </a:lnTo>
-                  <a:lnTo>
-                    <a:pt x="859470" y="899374"/>
-                  </a:lnTo>
-                  <a:lnTo>
-                    <a:pt x="931092" y="961060"/>
-                  </a:lnTo>
-                  <a:lnTo>
-                    <a:pt x="1002715" y="1020973"/>
-                  </a:lnTo>
-                  <a:lnTo>
-                    <a:pt x="1074337" y="1079163"/>
-                  </a:lnTo>
-                  <a:lnTo>
-                    <a:pt x="1145960" y="1135679"/>
-                  </a:lnTo>
-                  <a:lnTo>
-                    <a:pt x="1217582" y="1190570"/>
-                  </a:lnTo>
-                  <a:lnTo>
-                    <a:pt x="1289205" y="1243883"/>
-                  </a:lnTo>
-                  <a:lnTo>
-                    <a:pt x="1360827" y="1295663"/>
-                  </a:lnTo>
-                  <a:lnTo>
-                    <a:pt x="1432450" y="1345954"/>
-                  </a:lnTo>
-                  <a:lnTo>
-                    <a:pt x="1504073" y="1394798"/>
-                  </a:lnTo>
-                  <a:lnTo>
-                    <a:pt x="1575695" y="1442238"/>
-                  </a:lnTo>
-                  <a:lnTo>
-                    <a:pt x="1647318" y="1488314"/>
-                  </a:lnTo>
-                  <a:lnTo>
-                    <a:pt x="1718940" y="1533064"/>
-                  </a:lnTo>
-                  <a:lnTo>
-                    <a:pt x="1790563" y="1576528"/>
-                  </a:lnTo>
-                  <a:lnTo>
-                    <a:pt x="1862185" y="1618742"/>
-                  </a:lnTo>
-                  <a:lnTo>
-                    <a:pt x="1933808" y="1659742"/>
-                  </a:lnTo>
-                  <a:lnTo>
-                    <a:pt x="2005430" y="1699563"/>
-                  </a:lnTo>
-                  <a:lnTo>
-                    <a:pt x="2077053" y="1738239"/>
-                  </a:lnTo>
-                  <a:lnTo>
-                    <a:pt x="2148675" y="1775803"/>
-                  </a:lnTo>
-                  <a:lnTo>
-                    <a:pt x="2220298" y="1812286"/>
-                  </a:lnTo>
-                  <a:lnTo>
-                    <a:pt x="2291920" y="1847721"/>
-                  </a:lnTo>
-                  <a:lnTo>
-                    <a:pt x="2363543" y="1882136"/>
-                  </a:lnTo>
-                  <a:lnTo>
-                    <a:pt x="2435165" y="1915562"/>
-                  </a:lnTo>
-                  <a:lnTo>
-                    <a:pt x="2506788" y="1948026"/>
-                  </a:lnTo>
-                  <a:lnTo>
-                    <a:pt x="2578410" y="1979557"/>
-                  </a:lnTo>
-                  <a:lnTo>
-                    <a:pt x="2650033" y="2010181"/>
-                  </a:lnTo>
-                  <a:lnTo>
-                    <a:pt x="2721655" y="2039925"/>
-                  </a:lnTo>
-                  <a:lnTo>
-                    <a:pt x="2793278" y="2068813"/>
-                  </a:lnTo>
-                  <a:lnTo>
-                    <a:pt x="2864901" y="2096871"/>
-                  </a:lnTo>
-                  <a:lnTo>
-                    <a:pt x="2936523" y="2124122"/>
-                  </a:lnTo>
-                  <a:lnTo>
-                    <a:pt x="3008146" y="2150589"/>
-                  </a:lnTo>
-                  <a:lnTo>
-                    <a:pt x="3079768" y="2176295"/>
-                  </a:lnTo>
-                  <a:lnTo>
-                    <a:pt x="3151391" y="2201261"/>
-                  </a:lnTo>
-                  <a:lnTo>
-                    <a:pt x="3223013" y="2212871"/>
-                  </a:lnTo>
-                  <a:lnTo>
-                    <a:pt x="3294636" y="2207866"/>
-                  </a:lnTo>
-                  <a:lnTo>
-                    <a:pt x="3366258" y="2202830"/>
-                  </a:lnTo>
-                  <a:lnTo>
-                    <a:pt x="3437881" y="2197765"/>
-                  </a:lnTo>
-                  <a:lnTo>
-                    <a:pt x="3509503" y="2192668"/>
-                  </a:lnTo>
-                  <a:lnTo>
-                    <a:pt x="3581126" y="2187541"/>
-                  </a:lnTo>
-                  <a:lnTo>
-                    <a:pt x="3652748" y="2182384"/>
-                  </a:lnTo>
-                  <a:lnTo>
-                    <a:pt x="3724371" y="2177195"/>
-                  </a:lnTo>
-                  <a:lnTo>
-                    <a:pt x="3795993" y="2171975"/>
-                  </a:lnTo>
-                  <a:lnTo>
-                    <a:pt x="3867616" y="2166723"/>
-                  </a:lnTo>
-                  <a:lnTo>
-                    <a:pt x="3939238" y="2161440"/>
-                  </a:lnTo>
-                  <a:lnTo>
-                    <a:pt x="4010861" y="2156125"/>
-                  </a:lnTo>
-                  <a:lnTo>
-                    <a:pt x="4082483" y="2150779"/>
-                  </a:lnTo>
-                  <a:lnTo>
-                    <a:pt x="4154106" y="2145400"/>
-                  </a:lnTo>
-                  <a:lnTo>
-                    <a:pt x="4225729" y="2139988"/>
-                  </a:lnTo>
-                  <a:lnTo>
-                    <a:pt x="4297351" y="2134544"/>
-                  </a:lnTo>
-                  <a:lnTo>
-                    <a:pt x="4368974" y="2129067"/>
-                  </a:lnTo>
-                  <a:lnTo>
-                    <a:pt x="4440596" y="2123558"/>
-                  </a:lnTo>
-                  <a:lnTo>
-                    <a:pt x="4512219" y="2118015"/>
-                  </a:lnTo>
-                  <a:lnTo>
-                    <a:pt x="4583841" y="2112439"/>
-                  </a:lnTo>
-                  <a:lnTo>
-                    <a:pt x="4655464" y="2106829"/>
-                  </a:lnTo>
-                  <a:lnTo>
-                    <a:pt x="4727086" y="2101185"/>
-                  </a:lnTo>
-                  <a:lnTo>
-                    <a:pt x="4798709" y="2095508"/>
-                  </a:lnTo>
-                  <a:lnTo>
-                    <a:pt x="4870331" y="2089796"/>
-                  </a:lnTo>
-                  <a:lnTo>
-                    <a:pt x="4941954" y="2084050"/>
-                  </a:lnTo>
-                  <a:lnTo>
-                    <a:pt x="5013576" y="2078269"/>
-                  </a:lnTo>
-                  <a:lnTo>
-                    <a:pt x="5085199" y="2072454"/>
-                  </a:lnTo>
-                  <a:lnTo>
-                    <a:pt x="5156821" y="2066604"/>
-                  </a:lnTo>
-                  <a:lnTo>
-                    <a:pt x="5228444" y="2060718"/>
-                  </a:lnTo>
-                  <a:lnTo>
-                    <a:pt x="5300066" y="2054797"/>
-                  </a:lnTo>
-                  <a:lnTo>
-                    <a:pt x="5371689" y="2048840"/>
-                  </a:lnTo>
-                  <a:lnTo>
-                    <a:pt x="5443311" y="2042848"/>
-                  </a:lnTo>
-                  <a:lnTo>
-                    <a:pt x="5514934" y="2036819"/>
-                  </a:lnTo>
-                  <a:lnTo>
-                    <a:pt x="5586557" y="2030754"/>
-                  </a:lnTo>
-                  <a:lnTo>
-                    <a:pt x="5658179" y="2024653"/>
-                  </a:lnTo>
-                  <a:lnTo>
-                    <a:pt x="5729802" y="2018514"/>
-                  </a:lnTo>
-                  <a:lnTo>
-                    <a:pt x="5801424" y="2012339"/>
-                  </a:lnTo>
-                  <a:lnTo>
-                    <a:pt x="5873047" y="2006127"/>
-                  </a:lnTo>
-                  <a:lnTo>
-                    <a:pt x="5944669" y="1999878"/>
-                  </a:lnTo>
-                  <a:lnTo>
-                    <a:pt x="6016292" y="1993590"/>
-                  </a:lnTo>
-                  <a:lnTo>
-                    <a:pt x="6087914" y="1987265"/>
-                  </a:lnTo>
-                  <a:lnTo>
-                    <a:pt x="6159537" y="1980902"/>
-                  </a:lnTo>
-                  <a:lnTo>
-                    <a:pt x="6231159" y="1974501"/>
-                  </a:lnTo>
-                  <a:lnTo>
-                    <a:pt x="6302782" y="1968061"/>
-                  </a:lnTo>
-                  <a:lnTo>
-                    <a:pt x="6374404" y="1961582"/>
-                  </a:lnTo>
-                  <a:lnTo>
-                    <a:pt x="6446027" y="1955064"/>
-                  </a:lnTo>
-                  <a:lnTo>
-                    <a:pt x="6517649" y="1948507"/>
-                  </a:lnTo>
-                  <a:lnTo>
-                    <a:pt x="6589272" y="1941911"/>
-                  </a:lnTo>
-                  <a:lnTo>
-                    <a:pt x="6660894" y="1935275"/>
-                  </a:lnTo>
-                  <a:lnTo>
-                    <a:pt x="6732517" y="1928599"/>
-                  </a:lnTo>
-                  <a:lnTo>
-                    <a:pt x="6804139" y="1921882"/>
-                  </a:lnTo>
-                  <a:lnTo>
-                    <a:pt x="6875762" y="1915126"/>
-                  </a:lnTo>
-                  <a:lnTo>
-                    <a:pt x="6947385" y="1908328"/>
-                  </a:lnTo>
-                  <a:lnTo>
-                    <a:pt x="7019007" y="1901490"/>
-                  </a:lnTo>
-                  <a:lnTo>
-                    <a:pt x="7090630" y="1894611"/>
+                    <a:pt x="71622" y="89639"/>
+                  </a:lnTo>
+                  <a:lnTo>
+                    <a:pt x="143245" y="176677"/>
+                  </a:lnTo>
+                  <a:lnTo>
+                    <a:pt x="214867" y="261188"/>
+                  </a:lnTo>
+                  <a:lnTo>
+                    <a:pt x="286490" y="343247"/>
+                  </a:lnTo>
+                  <a:lnTo>
+                    <a:pt x="358112" y="422923"/>
+                  </a:lnTo>
+                  <a:lnTo>
+                    <a:pt x="429735" y="500286"/>
+                  </a:lnTo>
+                  <a:lnTo>
+                    <a:pt x="501357" y="575404"/>
+                  </a:lnTo>
+                  <a:lnTo>
+                    <a:pt x="572980" y="648341"/>
+                  </a:lnTo>
+                  <a:lnTo>
+                    <a:pt x="644602" y="719161"/>
+                  </a:lnTo>
+                  <a:lnTo>
+                    <a:pt x="716225" y="787925"/>
+                  </a:lnTo>
+                  <a:lnTo>
+                    <a:pt x="787847" y="854693"/>
+                  </a:lnTo>
+                  <a:lnTo>
+                    <a:pt x="859470" y="919523"/>
+                  </a:lnTo>
+                  <a:lnTo>
+                    <a:pt x="931092" y="982472"/>
+                  </a:lnTo>
+                  <a:lnTo>
+                    <a:pt x="1002715" y="1043593"/>
+                  </a:lnTo>
+                  <a:lnTo>
+                    <a:pt x="1074337" y="1102939"/>
+                  </a:lnTo>
+                  <a:lnTo>
+                    <a:pt x="1145960" y="1160563"/>
+                  </a:lnTo>
+                  <a:lnTo>
+                    <a:pt x="1217582" y="1216515"/>
+                  </a:lnTo>
+                  <a:lnTo>
+                    <a:pt x="1289205" y="1270842"/>
+                  </a:lnTo>
+                  <a:lnTo>
+                    <a:pt x="1360827" y="1323592"/>
+                  </a:lnTo>
+                  <a:lnTo>
+                    <a:pt x="1432450" y="1374811"/>
+                  </a:lnTo>
+                  <a:lnTo>
+                    <a:pt x="1504073" y="1424543"/>
+                  </a:lnTo>
+                  <a:lnTo>
+                    <a:pt x="1575695" y="1472832"/>
+                  </a:lnTo>
+                  <a:lnTo>
+                    <a:pt x="1647318" y="1519719"/>
+                  </a:lnTo>
+                  <a:lnTo>
+                    <a:pt x="1718940" y="1565245"/>
+                  </a:lnTo>
+                  <a:lnTo>
+                    <a:pt x="1790563" y="1609449"/>
+                  </a:lnTo>
+                  <a:lnTo>
+                    <a:pt x="1862185" y="1652370"/>
+                  </a:lnTo>
+                  <a:lnTo>
+                    <a:pt x="1933808" y="1694046"/>
+                  </a:lnTo>
+                  <a:lnTo>
+                    <a:pt x="2005430" y="1734511"/>
+                  </a:lnTo>
+                  <a:lnTo>
+                    <a:pt x="2077053" y="1773802"/>
+                  </a:lnTo>
+                  <a:lnTo>
+                    <a:pt x="2148675" y="1811953"/>
+                  </a:lnTo>
+                  <a:lnTo>
+                    <a:pt x="2220298" y="1848996"/>
+                  </a:lnTo>
+                  <a:lnTo>
+                    <a:pt x="2291920" y="1884964"/>
+                  </a:lnTo>
+                  <a:lnTo>
+                    <a:pt x="2363543" y="1919887"/>
+                  </a:lnTo>
+                  <a:lnTo>
+                    <a:pt x="2435165" y="1953797"/>
+                  </a:lnTo>
+                  <a:lnTo>
+                    <a:pt x="2506788" y="1986723"/>
+                  </a:lnTo>
+                  <a:lnTo>
+                    <a:pt x="2578410" y="2018693"/>
+                  </a:lnTo>
+                  <a:lnTo>
+                    <a:pt x="2650033" y="2049734"/>
+                  </a:lnTo>
+                  <a:lnTo>
+                    <a:pt x="2721655" y="2079875"/>
+                  </a:lnTo>
+                  <a:lnTo>
+                    <a:pt x="2793278" y="2109141"/>
+                  </a:lnTo>
+                  <a:lnTo>
+                    <a:pt x="2864901" y="2137557"/>
+                  </a:lnTo>
+                  <a:lnTo>
+                    <a:pt x="2936523" y="2165149"/>
+                  </a:lnTo>
+                  <a:lnTo>
+                    <a:pt x="3008146" y="2191939"/>
+                  </a:lnTo>
+                  <a:lnTo>
+                    <a:pt x="3079768" y="2217952"/>
+                  </a:lnTo>
+                  <a:lnTo>
+                    <a:pt x="3151391" y="2243210"/>
+                  </a:lnTo>
+                  <a:lnTo>
+                    <a:pt x="3223013" y="2257039"/>
+                  </a:lnTo>
+                  <a:lnTo>
+                    <a:pt x="3294636" y="2252820"/>
+                  </a:lnTo>
+                  <a:lnTo>
+                    <a:pt x="3366258" y="2248581"/>
+                  </a:lnTo>
+                  <a:lnTo>
+                    <a:pt x="3437881" y="2244319"/>
+                  </a:lnTo>
+                  <a:lnTo>
+                    <a:pt x="3509503" y="2240036"/>
+                  </a:lnTo>
+                  <a:lnTo>
+                    <a:pt x="3581126" y="2235732"/>
+                  </a:lnTo>
+                  <a:lnTo>
+                    <a:pt x="3652748" y="2231405"/>
+                  </a:lnTo>
+                  <a:lnTo>
+                    <a:pt x="3724371" y="2227057"/>
+                  </a:lnTo>
+                  <a:lnTo>
+                    <a:pt x="3795993" y="2222686"/>
+                  </a:lnTo>
+                  <a:lnTo>
+                    <a:pt x="3867616" y="2218294"/>
+                  </a:lnTo>
+                  <a:lnTo>
+                    <a:pt x="3939238" y="2213879"/>
+                  </a:lnTo>
+                  <a:lnTo>
+                    <a:pt x="4010861" y="2209441"/>
+                  </a:lnTo>
+                  <a:lnTo>
+                    <a:pt x="4082483" y="2204981"/>
+                  </a:lnTo>
+                  <a:lnTo>
+                    <a:pt x="4154106" y="2200499"/>
+                  </a:lnTo>
+                  <a:lnTo>
+                    <a:pt x="4225729" y="2195993"/>
+                  </a:lnTo>
+                  <a:lnTo>
+                    <a:pt x="4297351" y="2191465"/>
+                  </a:lnTo>
+                  <a:lnTo>
+                    <a:pt x="4368974" y="2186914"/>
+                  </a:lnTo>
+                  <a:lnTo>
+                    <a:pt x="4440596" y="2182340"/>
+                  </a:lnTo>
+                  <a:lnTo>
+                    <a:pt x="4512219" y="2177742"/>
+                  </a:lnTo>
+                  <a:lnTo>
+                    <a:pt x="4583841" y="2173121"/>
+                  </a:lnTo>
+                  <a:lnTo>
+                    <a:pt x="4655464" y="2168477"/>
+                  </a:lnTo>
+                  <a:lnTo>
+                    <a:pt x="4727086" y="2163809"/>
+                  </a:lnTo>
+                  <a:lnTo>
+                    <a:pt x="4798709" y="2159117"/>
+                  </a:lnTo>
+                  <a:lnTo>
+                    <a:pt x="4870331" y="2154402"/>
+                  </a:lnTo>
+                  <a:lnTo>
+                    <a:pt x="4941954" y="2149663"/>
+                  </a:lnTo>
+                  <a:lnTo>
+                    <a:pt x="5013576" y="2144899"/>
+                  </a:lnTo>
+                  <a:lnTo>
+                    <a:pt x="5085199" y="2140112"/>
+                  </a:lnTo>
+                  <a:lnTo>
+                    <a:pt x="5156821" y="2135300"/>
+                  </a:lnTo>
+                  <a:lnTo>
+                    <a:pt x="5228444" y="2130464"/>
+                  </a:lnTo>
+                  <a:lnTo>
+                    <a:pt x="5300066" y="2125603"/>
+                  </a:lnTo>
+                  <a:lnTo>
+                    <a:pt x="5371689" y="2120717"/>
+                  </a:lnTo>
+                  <a:lnTo>
+                    <a:pt x="5443311" y="2115807"/>
+                  </a:lnTo>
+                  <a:lnTo>
+                    <a:pt x="5514934" y="2110872"/>
+                  </a:lnTo>
+                  <a:lnTo>
+                    <a:pt x="5586557" y="2105912"/>
+                  </a:lnTo>
+                  <a:lnTo>
+                    <a:pt x="5658179" y="2100926"/>
+                  </a:lnTo>
+                  <a:lnTo>
+                    <a:pt x="5729802" y="2095915"/>
+                  </a:lnTo>
+                  <a:lnTo>
+                    <a:pt x="5801424" y="2090879"/>
+                  </a:lnTo>
+                  <a:lnTo>
+                    <a:pt x="5873047" y="2085817"/>
+                  </a:lnTo>
+                  <a:lnTo>
+                    <a:pt x="5944669" y="2080730"/>
+                  </a:lnTo>
+                  <a:lnTo>
+                    <a:pt x="6016292" y="2075617"/>
+                  </a:lnTo>
+                  <a:lnTo>
+                    <a:pt x="6087914" y="2070477"/>
+                  </a:lnTo>
+                  <a:lnTo>
+                    <a:pt x="6159537" y="2065312"/>
+                  </a:lnTo>
+                  <a:lnTo>
+                    <a:pt x="6231159" y="2060121"/>
+                  </a:lnTo>
+                  <a:lnTo>
+                    <a:pt x="6302782" y="2054903"/>
+                  </a:lnTo>
+                  <a:lnTo>
+                    <a:pt x="6374404" y="2049658"/>
+                  </a:lnTo>
+                  <a:lnTo>
+                    <a:pt x="6446027" y="2044387"/>
+                  </a:lnTo>
+                  <a:lnTo>
+                    <a:pt x="6517649" y="2039090"/>
+                  </a:lnTo>
+                  <a:lnTo>
+                    <a:pt x="6589272" y="2033765"/>
+                  </a:lnTo>
+                  <a:lnTo>
+                    <a:pt x="6660894" y="2028413"/>
+                  </a:lnTo>
+                  <a:lnTo>
+                    <a:pt x="6732517" y="2023034"/>
+                  </a:lnTo>
+                  <a:lnTo>
+                    <a:pt x="6804139" y="2017628"/>
+                  </a:lnTo>
+                  <a:lnTo>
+                    <a:pt x="6875762" y="2012195"/>
+                  </a:lnTo>
+                  <a:lnTo>
+                    <a:pt x="6947385" y="2006734"/>
+                  </a:lnTo>
+                  <a:lnTo>
+                    <a:pt x="7019007" y="2001245"/>
+                  </a:lnTo>
+                  <a:lnTo>
+                    <a:pt x="7090630" y="1995728"/>
                   </a:lnTo>
                 </a:path>
               </a:pathLst>
@@ -3958,312 +3958,312 @@
           </p:nvSpPr>
           <p:spPr>
             <a:xfrm>
-              <a:off x="1172049" y="4730592"/>
-              <a:ext cx="7090630" cy="657224"/>
+              <a:off x="1172049" y="4730405"/>
+              <a:ext cx="7090630" cy="659671"/>
             </a:xfrm>
             <a:custGeom>
               <a:avLst/>
               <a:pathLst>
-                <a:path w="7090630" h="657224">
+                <a:path w="7090630" h="659671">
                   <a:moveTo>
-                    <a:pt x="7090630" y="657224"/>
+                    <a:pt x="7090630" y="659671"/>
                   </a:moveTo>
                   <a:lnTo>
-                    <a:pt x="7019007" y="652208"/>
-                  </a:lnTo>
-                  <a:lnTo>
-                    <a:pt x="6947385" y="647043"/>
-                  </a:lnTo>
-                  <a:lnTo>
-                    <a:pt x="6875762" y="641725"/>
-                  </a:lnTo>
-                  <a:lnTo>
-                    <a:pt x="6804139" y="636249"/>
-                  </a:lnTo>
-                  <a:lnTo>
-                    <a:pt x="6732517" y="630612"/>
-                  </a:lnTo>
-                  <a:lnTo>
-                    <a:pt x="6660894" y="624807"/>
-                  </a:lnTo>
-                  <a:lnTo>
-                    <a:pt x="6589272" y="618831"/>
-                  </a:lnTo>
-                  <a:lnTo>
-                    <a:pt x="6517649" y="612677"/>
-                  </a:lnTo>
-                  <a:lnTo>
-                    <a:pt x="6446027" y="606342"/>
-                  </a:lnTo>
-                  <a:lnTo>
-                    <a:pt x="6374404" y="599819"/>
-                  </a:lnTo>
-                  <a:lnTo>
-                    <a:pt x="6302782" y="593103"/>
-                  </a:lnTo>
-                  <a:lnTo>
-                    <a:pt x="6231159" y="586187"/>
-                  </a:lnTo>
-                  <a:lnTo>
-                    <a:pt x="6159537" y="579068"/>
-                  </a:lnTo>
-                  <a:lnTo>
-                    <a:pt x="6087914" y="571737"/>
-                  </a:lnTo>
-                  <a:lnTo>
-                    <a:pt x="6016292" y="564189"/>
-                  </a:lnTo>
-                  <a:lnTo>
-                    <a:pt x="5944669" y="556418"/>
-                  </a:lnTo>
-                  <a:lnTo>
-                    <a:pt x="5873047" y="548417"/>
-                  </a:lnTo>
-                  <a:lnTo>
-                    <a:pt x="5801424" y="540179"/>
-                  </a:lnTo>
-                  <a:lnTo>
-                    <a:pt x="5729802" y="531697"/>
-                  </a:lnTo>
-                  <a:lnTo>
-                    <a:pt x="5658179" y="522963"/>
-                  </a:lnTo>
-                  <a:lnTo>
-                    <a:pt x="5586557" y="513972"/>
-                  </a:lnTo>
-                  <a:lnTo>
-                    <a:pt x="5514934" y="504714"/>
-                  </a:lnTo>
-                  <a:lnTo>
-                    <a:pt x="5443311" y="495182"/>
-                  </a:lnTo>
-                  <a:lnTo>
-                    <a:pt x="5371689" y="485367"/>
-                  </a:lnTo>
-                  <a:lnTo>
-                    <a:pt x="5300066" y="475262"/>
-                  </a:lnTo>
-                  <a:lnTo>
-                    <a:pt x="5228444" y="464858"/>
-                  </a:lnTo>
-                  <a:lnTo>
-                    <a:pt x="5156821" y="454146"/>
-                  </a:lnTo>
-                  <a:lnTo>
-                    <a:pt x="5085199" y="443117"/>
-                  </a:lnTo>
-                  <a:lnTo>
-                    <a:pt x="5013576" y="431761"/>
-                  </a:lnTo>
-                  <a:lnTo>
-                    <a:pt x="4941954" y="420069"/>
-                  </a:lnTo>
-                  <a:lnTo>
-                    <a:pt x="4870331" y="408031"/>
-                  </a:lnTo>
-                  <a:lnTo>
-                    <a:pt x="4798709" y="395636"/>
-                  </a:lnTo>
-                  <a:lnTo>
-                    <a:pt x="4727086" y="382874"/>
-                  </a:lnTo>
-                  <a:lnTo>
-                    <a:pt x="4655464" y="369735"/>
-                  </a:lnTo>
-                  <a:lnTo>
-                    <a:pt x="4583841" y="356206"/>
-                  </a:lnTo>
-                  <a:lnTo>
-                    <a:pt x="4512219" y="342277"/>
-                  </a:lnTo>
-                  <a:lnTo>
-                    <a:pt x="4440596" y="327935"/>
-                  </a:lnTo>
-                  <a:lnTo>
-                    <a:pt x="4368974" y="313169"/>
-                  </a:lnTo>
-                  <a:lnTo>
-                    <a:pt x="4297351" y="297966"/>
-                  </a:lnTo>
-                  <a:lnTo>
-                    <a:pt x="4225729" y="282312"/>
-                  </a:lnTo>
-                  <a:lnTo>
-                    <a:pt x="4154106" y="266196"/>
-                  </a:lnTo>
-                  <a:lnTo>
-                    <a:pt x="4082483" y="249601"/>
-                  </a:lnTo>
-                  <a:lnTo>
-                    <a:pt x="4010861" y="232516"/>
-                  </a:lnTo>
-                  <a:lnTo>
-                    <a:pt x="3939238" y="214925"/>
-                  </a:lnTo>
-                  <a:lnTo>
-                    <a:pt x="3867616" y="196812"/>
-                  </a:lnTo>
-                  <a:lnTo>
-                    <a:pt x="3795993" y="178164"/>
-                  </a:lnTo>
-                  <a:lnTo>
-                    <a:pt x="3724371" y="158963"/>
-                  </a:lnTo>
-                  <a:lnTo>
-                    <a:pt x="3652748" y="139194"/>
-                  </a:lnTo>
-                  <a:lnTo>
-                    <a:pt x="3581126" y="118840"/>
-                  </a:lnTo>
-                  <a:lnTo>
-                    <a:pt x="3509503" y="97883"/>
-                  </a:lnTo>
-                  <a:lnTo>
-                    <a:pt x="3437881" y="76305"/>
-                  </a:lnTo>
-                  <a:lnTo>
-                    <a:pt x="3366258" y="54089"/>
-                  </a:lnTo>
-                  <a:lnTo>
-                    <a:pt x="3294636" y="31215"/>
-                  </a:lnTo>
-                  <a:lnTo>
-                    <a:pt x="3223013" y="7663"/>
+                    <a:pt x="7019007" y="654673"/>
+                  </a:lnTo>
+                  <a:lnTo>
+                    <a:pt x="6947385" y="649526"/>
+                  </a:lnTo>
+                  <a:lnTo>
+                    <a:pt x="6875762" y="644225"/>
+                  </a:lnTo>
+                  <a:lnTo>
+                    <a:pt x="6804139" y="638765"/>
+                  </a:lnTo>
+                  <a:lnTo>
+                    <a:pt x="6732517" y="633143"/>
+                  </a:lnTo>
+                  <a:lnTo>
+                    <a:pt x="6660894" y="627352"/>
+                  </a:lnTo>
+                  <a:lnTo>
+                    <a:pt x="6589272" y="621388"/>
+                  </a:lnTo>
+                  <a:lnTo>
+                    <a:pt x="6517649" y="615246"/>
+                  </a:lnTo>
+                  <a:lnTo>
+                    <a:pt x="6446027" y="608920"/>
+                  </a:lnTo>
+                  <a:lnTo>
+                    <a:pt x="6374404" y="602405"/>
+                  </a:lnTo>
+                  <a:lnTo>
+                    <a:pt x="6302782" y="595695"/>
+                  </a:lnTo>
+                  <a:lnTo>
+                    <a:pt x="6231159" y="588785"/>
+                  </a:lnTo>
+                  <a:lnTo>
+                    <a:pt x="6159537" y="581668"/>
+                  </a:lnTo>
+                  <a:lnTo>
+                    <a:pt x="6087914" y="574338"/>
+                  </a:lnTo>
+                  <a:lnTo>
+                    <a:pt x="6016292" y="566790"/>
+                  </a:lnTo>
+                  <a:lnTo>
+                    <a:pt x="5944669" y="559015"/>
+                  </a:lnTo>
+                  <a:lnTo>
+                    <a:pt x="5873047" y="551008"/>
+                  </a:lnTo>
+                  <a:lnTo>
+                    <a:pt x="5801424" y="542762"/>
+                  </a:lnTo>
+                  <a:lnTo>
+                    <a:pt x="5729802" y="534269"/>
+                  </a:lnTo>
+                  <a:lnTo>
+                    <a:pt x="5658179" y="525523"/>
+                  </a:lnTo>
+                  <a:lnTo>
+                    <a:pt x="5586557" y="516515"/>
+                  </a:lnTo>
+                  <a:lnTo>
+                    <a:pt x="5514934" y="507237"/>
+                  </a:lnTo>
+                  <a:lnTo>
+                    <a:pt x="5443311" y="497682"/>
+                  </a:lnTo>
+                  <a:lnTo>
+                    <a:pt x="5371689" y="487842"/>
+                  </a:lnTo>
+                  <a:lnTo>
+                    <a:pt x="5300066" y="477707"/>
+                  </a:lnTo>
+                  <a:lnTo>
+                    <a:pt x="5228444" y="467270"/>
+                  </a:lnTo>
+                  <a:lnTo>
+                    <a:pt x="5156821" y="456520"/>
+                  </a:lnTo>
+                  <a:lnTo>
+                    <a:pt x="5085199" y="445449"/>
+                  </a:lnTo>
+                  <a:lnTo>
+                    <a:pt x="5013576" y="434047"/>
+                  </a:lnTo>
+                  <a:lnTo>
+                    <a:pt x="4941954" y="422304"/>
+                  </a:lnTo>
+                  <a:lnTo>
+                    <a:pt x="4870331" y="410210"/>
+                  </a:lnTo>
+                  <a:lnTo>
+                    <a:pt x="4798709" y="397755"/>
+                  </a:lnTo>
+                  <a:lnTo>
+                    <a:pt x="4727086" y="384927"/>
+                  </a:lnTo>
+                  <a:lnTo>
+                    <a:pt x="4655464" y="371716"/>
+                  </a:lnTo>
+                  <a:lnTo>
+                    <a:pt x="4583841" y="358109"/>
+                  </a:lnTo>
+                  <a:lnTo>
+                    <a:pt x="4512219" y="344096"/>
+                  </a:lnTo>
+                  <a:lnTo>
+                    <a:pt x="4440596" y="329664"/>
+                  </a:lnTo>
+                  <a:lnTo>
+                    <a:pt x="4368974" y="314801"/>
+                  </a:lnTo>
+                  <a:lnTo>
+                    <a:pt x="4297351" y="299493"/>
+                  </a:lnTo>
+                  <a:lnTo>
+                    <a:pt x="4225729" y="283728"/>
+                  </a:lnTo>
+                  <a:lnTo>
+                    <a:pt x="4154106" y="267491"/>
+                  </a:lnTo>
+                  <a:lnTo>
+                    <a:pt x="4082483" y="250769"/>
+                  </a:lnTo>
+                  <a:lnTo>
+                    <a:pt x="4010861" y="233547"/>
+                  </a:lnTo>
+                  <a:lnTo>
+                    <a:pt x="3939238" y="215810"/>
+                  </a:lnTo>
+                  <a:lnTo>
+                    <a:pt x="3867616" y="197543"/>
+                  </a:lnTo>
+                  <a:lnTo>
+                    <a:pt x="3795993" y="178730"/>
+                  </a:lnTo>
+                  <a:lnTo>
+                    <a:pt x="3724371" y="159354"/>
+                  </a:lnTo>
+                  <a:lnTo>
+                    <a:pt x="3652748" y="139399"/>
+                  </a:lnTo>
+                  <a:lnTo>
+                    <a:pt x="3581126" y="118848"/>
+                  </a:lnTo>
+                  <a:lnTo>
+                    <a:pt x="3509503" y="97682"/>
+                  </a:lnTo>
+                  <a:lnTo>
+                    <a:pt x="3437881" y="75883"/>
+                  </a:lnTo>
+                  <a:lnTo>
+                    <a:pt x="3366258" y="53433"/>
+                  </a:lnTo>
+                  <a:lnTo>
+                    <a:pt x="3294636" y="30311"/>
+                  </a:lnTo>
+                  <a:lnTo>
+                    <a:pt x="3223013" y="6499"/>
                   </a:lnTo>
                   <a:lnTo>
                     <a:pt x="3151391" y="0"/>
                   </a:lnTo>
                   <a:lnTo>
-                    <a:pt x="3079768" y="4945"/>
-                  </a:lnTo>
-                  <a:lnTo>
-                    <a:pt x="3008146" y="9861"/>
-                  </a:lnTo>
-                  <a:lnTo>
-                    <a:pt x="2936523" y="14748"/>
-                  </a:lnTo>
-                  <a:lnTo>
-                    <a:pt x="2864901" y="19605"/>
-                  </a:lnTo>
-                  <a:lnTo>
-                    <a:pt x="2793278" y="24433"/>
-                  </a:lnTo>
-                  <a:lnTo>
-                    <a:pt x="2721655" y="29233"/>
-                  </a:lnTo>
-                  <a:lnTo>
-                    <a:pt x="2650033" y="34004"/>
-                  </a:lnTo>
-                  <a:lnTo>
-                    <a:pt x="2578410" y="38746"/>
-                  </a:lnTo>
-                  <a:lnTo>
-                    <a:pt x="2506788" y="43459"/>
-                  </a:lnTo>
-                  <a:lnTo>
-                    <a:pt x="2435165" y="48145"/>
-                  </a:lnTo>
-                  <a:lnTo>
-                    <a:pt x="2363543" y="52803"/>
-                  </a:lnTo>
-                  <a:lnTo>
-                    <a:pt x="2291920" y="57432"/>
-                  </a:lnTo>
-                  <a:lnTo>
-                    <a:pt x="2220298" y="62034"/>
-                  </a:lnTo>
-                  <a:lnTo>
-                    <a:pt x="2148675" y="66609"/>
-                  </a:lnTo>
-                  <a:lnTo>
-                    <a:pt x="2077053" y="71156"/>
-                  </a:lnTo>
-                  <a:lnTo>
-                    <a:pt x="2005430" y="75676"/>
-                  </a:lnTo>
-                  <a:lnTo>
-                    <a:pt x="1933808" y="80169"/>
-                  </a:lnTo>
-                  <a:lnTo>
-                    <a:pt x="1862185" y="84635"/>
-                  </a:lnTo>
-                  <a:lnTo>
-                    <a:pt x="1790563" y="89074"/>
-                  </a:lnTo>
-                  <a:lnTo>
-                    <a:pt x="1718940" y="93487"/>
-                  </a:lnTo>
-                  <a:lnTo>
-                    <a:pt x="1647318" y="97873"/>
-                  </a:lnTo>
-                  <a:lnTo>
-                    <a:pt x="1575695" y="102233"/>
-                  </a:lnTo>
-                  <a:lnTo>
-                    <a:pt x="1504073" y="106567"/>
-                  </a:lnTo>
-                  <a:lnTo>
-                    <a:pt x="1432450" y="110875"/>
-                  </a:lnTo>
-                  <a:lnTo>
-                    <a:pt x="1360827" y="115157"/>
-                  </a:lnTo>
-                  <a:lnTo>
-                    <a:pt x="1289205" y="119414"/>
-                  </a:lnTo>
-                  <a:lnTo>
-                    <a:pt x="1217582" y="123645"/>
-                  </a:lnTo>
-                  <a:lnTo>
-                    <a:pt x="1145960" y="127851"/>
-                  </a:lnTo>
-                  <a:lnTo>
-                    <a:pt x="1074337" y="132032"/>
-                  </a:lnTo>
-                  <a:lnTo>
-                    <a:pt x="1002715" y="136187"/>
-                  </a:lnTo>
-                  <a:lnTo>
-                    <a:pt x="931092" y="140318"/>
-                  </a:lnTo>
-                  <a:lnTo>
-                    <a:pt x="859470" y="144424"/>
-                  </a:lnTo>
-                  <a:lnTo>
-                    <a:pt x="787847" y="148506"/>
-                  </a:lnTo>
-                  <a:lnTo>
-                    <a:pt x="716225" y="152563"/>
-                  </a:lnTo>
-                  <a:lnTo>
-                    <a:pt x="644602" y="156596"/>
-                  </a:lnTo>
-                  <a:lnTo>
-                    <a:pt x="572980" y="160605"/>
-                  </a:lnTo>
-                  <a:lnTo>
-                    <a:pt x="501357" y="164589"/>
-                  </a:lnTo>
-                  <a:lnTo>
-                    <a:pt x="429735" y="168550"/>
-                  </a:lnTo>
-                  <a:lnTo>
-                    <a:pt x="358112" y="172488"/>
-                  </a:lnTo>
-                  <a:lnTo>
-                    <a:pt x="286490" y="176401"/>
-                  </a:lnTo>
-                  <a:lnTo>
-                    <a:pt x="214867" y="180292"/>
-                  </a:lnTo>
-                  <a:lnTo>
-                    <a:pt x="143245" y="184158"/>
-                  </a:lnTo>
-                  <a:lnTo>
-                    <a:pt x="71622" y="188002"/>
-                  </a:lnTo>
-                  <a:lnTo>
-                    <a:pt x="0" y="191823"/>
+                    <a:pt x="3079768" y="4175"/>
+                  </a:lnTo>
+                  <a:lnTo>
+                    <a:pt x="3008146" y="8330"/>
+                  </a:lnTo>
+                  <a:lnTo>
+                    <a:pt x="2936523" y="12464"/>
+                  </a:lnTo>
+                  <a:lnTo>
+                    <a:pt x="2864901" y="16577"/>
+                  </a:lnTo>
+                  <a:lnTo>
+                    <a:pt x="2793278" y="20669"/>
+                  </a:lnTo>
+                  <a:lnTo>
+                    <a:pt x="2721655" y="24740"/>
+                  </a:lnTo>
+                  <a:lnTo>
+                    <a:pt x="2650033" y="28791"/>
+                  </a:lnTo>
+                  <a:lnTo>
+                    <a:pt x="2578410" y="32822"/>
+                  </a:lnTo>
+                  <a:lnTo>
+                    <a:pt x="2506788" y="36832"/>
+                  </a:lnTo>
+                  <a:lnTo>
+                    <a:pt x="2435165" y="40822"/>
+                  </a:lnTo>
+                  <a:lnTo>
+                    <a:pt x="2363543" y="44791"/>
+                  </a:lnTo>
+                  <a:lnTo>
+                    <a:pt x="2291920" y="48741"/>
+                  </a:lnTo>
+                  <a:lnTo>
+                    <a:pt x="2220298" y="52670"/>
+                  </a:lnTo>
+                  <a:lnTo>
+                    <a:pt x="2148675" y="56580"/>
+                  </a:lnTo>
+                  <a:lnTo>
+                    <a:pt x="2077053" y="60470"/>
+                  </a:lnTo>
+                  <a:lnTo>
+                    <a:pt x="2005430" y="64341"/>
+                  </a:lnTo>
+                  <a:lnTo>
+                    <a:pt x="1933808" y="68192"/>
+                  </a:lnTo>
+                  <a:lnTo>
+                    <a:pt x="1862185" y="72023"/>
+                  </a:lnTo>
+                  <a:lnTo>
+                    <a:pt x="1790563" y="75835"/>
+                  </a:lnTo>
+                  <a:lnTo>
+                    <a:pt x="1718940" y="79628"/>
+                  </a:lnTo>
+                  <a:lnTo>
+                    <a:pt x="1647318" y="83402"/>
+                  </a:lnTo>
+                  <a:lnTo>
+                    <a:pt x="1575695" y="87156"/>
+                  </a:lnTo>
+                  <a:lnTo>
+                    <a:pt x="1504073" y="90892"/>
+                  </a:lnTo>
+                  <a:lnTo>
+                    <a:pt x="1432450" y="94609"/>
+                  </a:lnTo>
+                  <a:lnTo>
+                    <a:pt x="1360827" y="98307"/>
+                  </a:lnTo>
+                  <a:lnTo>
+                    <a:pt x="1289205" y="101986"/>
+                  </a:lnTo>
+                  <a:lnTo>
+                    <a:pt x="1217582" y="105647"/>
+                  </a:lnTo>
+                  <a:lnTo>
+                    <a:pt x="1145960" y="109289"/>
+                  </a:lnTo>
+                  <a:lnTo>
+                    <a:pt x="1074337" y="112913"/>
+                  </a:lnTo>
+                  <a:lnTo>
+                    <a:pt x="1002715" y="116519"/>
+                  </a:lnTo>
+                  <a:lnTo>
+                    <a:pt x="931092" y="120106"/>
+                  </a:lnTo>
+                  <a:lnTo>
+                    <a:pt x="859470" y="123675"/>
+                  </a:lnTo>
+                  <a:lnTo>
+                    <a:pt x="787847" y="127227"/>
+                  </a:lnTo>
+                  <a:lnTo>
+                    <a:pt x="716225" y="130760"/>
+                  </a:lnTo>
+                  <a:lnTo>
+                    <a:pt x="644602" y="134275"/>
+                  </a:lnTo>
+                  <a:lnTo>
+                    <a:pt x="572980" y="137773"/>
+                  </a:lnTo>
+                  <a:lnTo>
+                    <a:pt x="501357" y="141253"/>
+                  </a:lnTo>
+                  <a:lnTo>
+                    <a:pt x="429735" y="144716"/>
+                  </a:lnTo>
+                  <a:lnTo>
+                    <a:pt x="358112" y="148161"/>
+                  </a:lnTo>
+                  <a:lnTo>
+                    <a:pt x="286490" y="151588"/>
+                  </a:lnTo>
+                  <a:lnTo>
+                    <a:pt x="214867" y="154998"/>
+                  </a:lnTo>
+                  <a:lnTo>
+                    <a:pt x="143245" y="158391"/>
+                  </a:lnTo>
+                  <a:lnTo>
+                    <a:pt x="71622" y="161767"/>
+                  </a:lnTo>
+                  <a:lnTo>
+                    <a:pt x="0" y="165126"/>
                   </a:lnTo>
                 </a:path>
               </a:pathLst>
@@ -4283,312 +4283,312 @@
           </p:nvSpPr>
           <p:spPr>
             <a:xfrm>
-              <a:off x="1172049" y="4167014"/>
-              <a:ext cx="7090630" cy="948840"/>
+              <a:off x="1172049" y="4127761"/>
+              <a:ext cx="7090630" cy="1002157"/>
             </a:xfrm>
             <a:custGeom>
               <a:avLst/>
               <a:pathLst>
-                <a:path w="7090630" h="948840">
+                <a:path w="7090630" h="1002157">
                   <a:moveTo>
                     <a:pt x="0" y="0"/>
                   </a:moveTo>
                   <a:lnTo>
-                    <a:pt x="71622" y="16018"/>
-                  </a:lnTo>
-                  <a:lnTo>
-                    <a:pt x="143245" y="31851"/>
-                  </a:lnTo>
-                  <a:lnTo>
-                    <a:pt x="214867" y="47502"/>
-                  </a:lnTo>
-                  <a:lnTo>
-                    <a:pt x="286490" y="62973"/>
-                  </a:lnTo>
-                  <a:lnTo>
-                    <a:pt x="358112" y="78266"/>
-                  </a:lnTo>
-                  <a:lnTo>
-                    <a:pt x="429735" y="93382"/>
-                  </a:lnTo>
-                  <a:lnTo>
-                    <a:pt x="501357" y="108324"/>
-                  </a:lnTo>
-                  <a:lnTo>
-                    <a:pt x="572980" y="123094"/>
-                  </a:lnTo>
-                  <a:lnTo>
-                    <a:pt x="644602" y="137694"/>
-                  </a:lnTo>
-                  <a:lnTo>
-                    <a:pt x="716225" y="152126"/>
-                  </a:lnTo>
-                  <a:lnTo>
-                    <a:pt x="787847" y="166391"/>
-                  </a:lnTo>
-                  <a:lnTo>
-                    <a:pt x="859470" y="180492"/>
-                  </a:lnTo>
-                  <a:lnTo>
-                    <a:pt x="931092" y="194430"/>
-                  </a:lnTo>
-                  <a:lnTo>
-                    <a:pt x="1002715" y="208208"/>
-                  </a:lnTo>
-                  <a:lnTo>
-                    <a:pt x="1074337" y="221828"/>
-                  </a:lnTo>
-                  <a:lnTo>
-                    <a:pt x="1145960" y="235290"/>
-                  </a:lnTo>
-                  <a:lnTo>
-                    <a:pt x="1217582" y="248597"/>
-                  </a:lnTo>
-                  <a:lnTo>
-                    <a:pt x="1289205" y="261751"/>
-                  </a:lnTo>
-                  <a:lnTo>
-                    <a:pt x="1360827" y="274753"/>
-                  </a:lnTo>
-                  <a:lnTo>
-                    <a:pt x="1432450" y="287605"/>
-                  </a:lnTo>
-                  <a:lnTo>
-                    <a:pt x="1504073" y="300310"/>
-                  </a:lnTo>
-                  <a:lnTo>
-                    <a:pt x="1575695" y="312868"/>
-                  </a:lnTo>
-                  <a:lnTo>
-                    <a:pt x="1647318" y="325281"/>
-                  </a:lnTo>
-                  <a:lnTo>
-                    <a:pt x="1718940" y="337551"/>
-                  </a:lnTo>
-                  <a:lnTo>
-                    <a:pt x="1790563" y="349680"/>
-                  </a:lnTo>
-                  <a:lnTo>
-                    <a:pt x="1862185" y="361669"/>
-                  </a:lnTo>
-                  <a:lnTo>
-                    <a:pt x="1933808" y="373520"/>
-                  </a:lnTo>
-                  <a:lnTo>
-                    <a:pt x="2005430" y="385235"/>
-                  </a:lnTo>
-                  <a:lnTo>
-                    <a:pt x="2077053" y="396814"/>
-                  </a:lnTo>
-                  <a:lnTo>
-                    <a:pt x="2148675" y="408260"/>
-                  </a:lnTo>
-                  <a:lnTo>
-                    <a:pt x="2220298" y="419575"/>
-                  </a:lnTo>
-                  <a:lnTo>
-                    <a:pt x="2291920" y="430758"/>
-                  </a:lnTo>
-                  <a:lnTo>
-                    <a:pt x="2363543" y="441813"/>
-                  </a:lnTo>
-                  <a:lnTo>
-                    <a:pt x="2435165" y="452741"/>
-                  </a:lnTo>
-                  <a:lnTo>
-                    <a:pt x="2506788" y="463543"/>
-                  </a:lnTo>
-                  <a:lnTo>
-                    <a:pt x="2578410" y="474220"/>
-                  </a:lnTo>
-                  <a:lnTo>
-                    <a:pt x="2650033" y="484774"/>
-                  </a:lnTo>
-                  <a:lnTo>
-                    <a:pt x="2721655" y="495207"/>
-                  </a:lnTo>
-                  <a:lnTo>
-                    <a:pt x="2793278" y="505519"/>
-                  </a:lnTo>
-                  <a:lnTo>
-                    <a:pt x="2864901" y="515713"/>
-                  </a:lnTo>
-                  <a:lnTo>
-                    <a:pt x="2936523" y="525789"/>
-                  </a:lnTo>
-                  <a:lnTo>
-                    <a:pt x="3008146" y="535749"/>
-                  </a:lnTo>
-                  <a:lnTo>
-                    <a:pt x="3079768" y="545594"/>
-                  </a:lnTo>
-                  <a:lnTo>
-                    <a:pt x="3151391" y="555326"/>
-                  </a:lnTo>
-                  <a:lnTo>
-                    <a:pt x="3223013" y="564946"/>
-                  </a:lnTo>
-                  <a:lnTo>
-                    <a:pt x="3294636" y="574455"/>
-                  </a:lnTo>
-                  <a:lnTo>
-                    <a:pt x="3366258" y="583854"/>
-                  </a:lnTo>
-                  <a:lnTo>
-                    <a:pt x="3437881" y="593145"/>
-                  </a:lnTo>
-                  <a:lnTo>
-                    <a:pt x="3509503" y="602329"/>
-                  </a:lnTo>
-                  <a:lnTo>
-                    <a:pt x="3581126" y="611407"/>
-                  </a:lnTo>
-                  <a:lnTo>
-                    <a:pt x="3652748" y="620381"/>
-                  </a:lnTo>
-                  <a:lnTo>
-                    <a:pt x="3724371" y="629251"/>
-                  </a:lnTo>
-                  <a:lnTo>
-                    <a:pt x="3795993" y="638019"/>
-                  </a:lnTo>
-                  <a:lnTo>
-                    <a:pt x="3867616" y="646686"/>
-                  </a:lnTo>
-                  <a:lnTo>
-                    <a:pt x="3939238" y="655253"/>
-                  </a:lnTo>
-                  <a:lnTo>
-                    <a:pt x="4010861" y="663721"/>
-                  </a:lnTo>
-                  <a:lnTo>
-                    <a:pt x="4082483" y="672092"/>
-                  </a:lnTo>
-                  <a:lnTo>
-                    <a:pt x="4154106" y="680366"/>
-                  </a:lnTo>
-                  <a:lnTo>
-                    <a:pt x="4225729" y="688545"/>
-                  </a:lnTo>
-                  <a:lnTo>
-                    <a:pt x="4297351" y="696630"/>
-                  </a:lnTo>
-                  <a:lnTo>
-                    <a:pt x="4368974" y="704622"/>
-                  </a:lnTo>
-                  <a:lnTo>
-                    <a:pt x="4440596" y="712521"/>
-                  </a:lnTo>
-                  <a:lnTo>
-                    <a:pt x="4512219" y="720330"/>
-                  </a:lnTo>
-                  <a:lnTo>
-                    <a:pt x="4583841" y="728048"/>
-                  </a:lnTo>
-                  <a:lnTo>
-                    <a:pt x="4655464" y="735678"/>
-                  </a:lnTo>
-                  <a:lnTo>
-                    <a:pt x="4727086" y="743220"/>
-                  </a:lnTo>
-                  <a:lnTo>
-                    <a:pt x="4798709" y="750675"/>
-                  </a:lnTo>
-                  <a:lnTo>
-                    <a:pt x="4870331" y="758044"/>
-                  </a:lnTo>
-                  <a:lnTo>
-                    <a:pt x="4941954" y="765328"/>
-                  </a:lnTo>
-                  <a:lnTo>
-                    <a:pt x="5013576" y="772528"/>
-                  </a:lnTo>
-                  <a:lnTo>
-                    <a:pt x="5085199" y="779645"/>
-                  </a:lnTo>
-                  <a:lnTo>
-                    <a:pt x="5156821" y="786680"/>
-                  </a:lnTo>
-                  <a:lnTo>
-                    <a:pt x="5228444" y="793634"/>
-                  </a:lnTo>
-                  <a:lnTo>
-                    <a:pt x="5300066" y="800508"/>
-                  </a:lnTo>
-                  <a:lnTo>
-                    <a:pt x="5371689" y="807303"/>
-                  </a:lnTo>
-                  <a:lnTo>
-                    <a:pt x="5443311" y="814019"/>
-                  </a:lnTo>
-                  <a:lnTo>
-                    <a:pt x="5514934" y="820658"/>
-                  </a:lnTo>
-                  <a:lnTo>
-                    <a:pt x="5586557" y="827221"/>
-                  </a:lnTo>
-                  <a:lnTo>
-                    <a:pt x="5658179" y="833708"/>
-                  </a:lnTo>
-                  <a:lnTo>
-                    <a:pt x="5729802" y="840120"/>
-                  </a:lnTo>
-                  <a:lnTo>
-                    <a:pt x="5801424" y="846459"/>
-                  </a:lnTo>
-                  <a:lnTo>
-                    <a:pt x="5873047" y="852724"/>
-                  </a:lnTo>
-                  <a:lnTo>
-                    <a:pt x="5944669" y="858917"/>
-                  </a:lnTo>
-                  <a:lnTo>
-                    <a:pt x="6016292" y="865039"/>
-                  </a:lnTo>
-                  <a:lnTo>
-                    <a:pt x="6087914" y="871090"/>
-                  </a:lnTo>
-                  <a:lnTo>
-                    <a:pt x="6159537" y="877072"/>
-                  </a:lnTo>
-                  <a:lnTo>
-                    <a:pt x="6231159" y="882984"/>
-                  </a:lnTo>
-                  <a:lnTo>
-                    <a:pt x="6302782" y="888829"/>
-                  </a:lnTo>
-                  <a:lnTo>
-                    <a:pt x="6374404" y="894606"/>
-                  </a:lnTo>
-                  <a:lnTo>
-                    <a:pt x="6446027" y="900316"/>
-                  </a:lnTo>
-                  <a:lnTo>
-                    <a:pt x="6517649" y="905961"/>
-                  </a:lnTo>
-                  <a:lnTo>
-                    <a:pt x="6589272" y="911541"/>
-                  </a:lnTo>
-                  <a:lnTo>
-                    <a:pt x="6660894" y="917056"/>
-                  </a:lnTo>
-                  <a:lnTo>
-                    <a:pt x="6732517" y="922508"/>
-                  </a:lnTo>
-                  <a:lnTo>
-                    <a:pt x="6804139" y="927897"/>
-                  </a:lnTo>
-                  <a:lnTo>
-                    <a:pt x="6875762" y="933224"/>
-                  </a:lnTo>
-                  <a:lnTo>
-                    <a:pt x="6947385" y="938490"/>
-                  </a:lnTo>
-                  <a:lnTo>
-                    <a:pt x="7019007" y="943695"/>
-                  </a:lnTo>
-                  <a:lnTo>
-                    <a:pt x="7090630" y="948840"/>
+                    <a:pt x="71622" y="17329"/>
+                  </a:lnTo>
+                  <a:lnTo>
+                    <a:pt x="143245" y="34449"/>
+                  </a:lnTo>
+                  <a:lnTo>
+                    <a:pt x="214867" y="51361"/>
+                  </a:lnTo>
+                  <a:lnTo>
+                    <a:pt x="286490" y="68068"/>
+                  </a:lnTo>
+                  <a:lnTo>
+                    <a:pt x="358112" y="84572"/>
+                  </a:lnTo>
+                  <a:lnTo>
+                    <a:pt x="429735" y="100877"/>
+                  </a:lnTo>
+                  <a:lnTo>
+                    <a:pt x="501357" y="116984"/>
+                  </a:lnTo>
+                  <a:lnTo>
+                    <a:pt x="572980" y="132895"/>
+                  </a:lnTo>
+                  <a:lnTo>
+                    <a:pt x="644602" y="148614"/>
+                  </a:lnTo>
+                  <a:lnTo>
+                    <a:pt x="716225" y="164142"/>
+                  </a:lnTo>
+                  <a:lnTo>
+                    <a:pt x="787847" y="179482"/>
+                  </a:lnTo>
+                  <a:lnTo>
+                    <a:pt x="859470" y="194636"/>
+                  </a:lnTo>
+                  <a:lnTo>
+                    <a:pt x="931092" y="209606"/>
+                  </a:lnTo>
+                  <a:lnTo>
+                    <a:pt x="1002715" y="224394"/>
+                  </a:lnTo>
+                  <a:lnTo>
+                    <a:pt x="1074337" y="239004"/>
+                  </a:lnTo>
+                  <a:lnTo>
+                    <a:pt x="1145960" y="253436"/>
+                  </a:lnTo>
+                  <a:lnTo>
+                    <a:pt x="1217582" y="267693"/>
+                  </a:lnTo>
+                  <a:lnTo>
+                    <a:pt x="1289205" y="281778"/>
+                  </a:lnTo>
+                  <a:lnTo>
+                    <a:pt x="1360827" y="295691"/>
+                  </a:lnTo>
+                  <a:lnTo>
+                    <a:pt x="1432450" y="309436"/>
+                  </a:lnTo>
+                  <a:lnTo>
+                    <a:pt x="1504073" y="323015"/>
+                  </a:lnTo>
+                  <a:lnTo>
+                    <a:pt x="1575695" y="336429"/>
+                  </a:lnTo>
+                  <a:lnTo>
+                    <a:pt x="1647318" y="349680"/>
+                  </a:lnTo>
+                  <a:lnTo>
+                    <a:pt x="1718940" y="362770"/>
+                  </a:lnTo>
+                  <a:lnTo>
+                    <a:pt x="1790563" y="375702"/>
+                  </a:lnTo>
+                  <a:lnTo>
+                    <a:pt x="1862185" y="388477"/>
+                  </a:lnTo>
+                  <a:lnTo>
+                    <a:pt x="1933808" y="401097"/>
+                  </a:lnTo>
+                  <a:lnTo>
+                    <a:pt x="2005430" y="413565"/>
+                  </a:lnTo>
+                  <a:lnTo>
+                    <a:pt x="2077053" y="425881"/>
+                  </a:lnTo>
+                  <a:lnTo>
+                    <a:pt x="2148675" y="438047"/>
+                  </a:lnTo>
+                  <a:lnTo>
+                    <a:pt x="2220298" y="450067"/>
+                  </a:lnTo>
+                  <a:lnTo>
+                    <a:pt x="2291920" y="461940"/>
+                  </a:lnTo>
+                  <a:lnTo>
+                    <a:pt x="2363543" y="473670"/>
+                  </a:lnTo>
+                  <a:lnTo>
+                    <a:pt x="2435165" y="485257"/>
+                  </a:lnTo>
+                  <a:lnTo>
+                    <a:pt x="2506788" y="496704"/>
+                  </a:lnTo>
+                  <a:lnTo>
+                    <a:pt x="2578410" y="508012"/>
+                  </a:lnTo>
+                  <a:lnTo>
+                    <a:pt x="2650033" y="519183"/>
+                  </a:lnTo>
+                  <a:lnTo>
+                    <a:pt x="2721655" y="530219"/>
+                  </a:lnTo>
+                  <a:lnTo>
+                    <a:pt x="2793278" y="541121"/>
+                  </a:lnTo>
+                  <a:lnTo>
+                    <a:pt x="2864901" y="551890"/>
+                  </a:lnTo>
+                  <a:lnTo>
+                    <a:pt x="2936523" y="562530"/>
+                  </a:lnTo>
+                  <a:lnTo>
+                    <a:pt x="3008146" y="573040"/>
+                  </a:lnTo>
+                  <a:lnTo>
+                    <a:pt x="3079768" y="583422"/>
+                  </a:lnTo>
+                  <a:lnTo>
+                    <a:pt x="3151391" y="593679"/>
+                  </a:lnTo>
+                  <a:lnTo>
+                    <a:pt x="3223013" y="603812"/>
+                  </a:lnTo>
+                  <a:lnTo>
+                    <a:pt x="3294636" y="613822"/>
+                  </a:lnTo>
+                  <a:lnTo>
+                    <a:pt x="3366258" y="623710"/>
+                  </a:lnTo>
+                  <a:lnTo>
+                    <a:pt x="3437881" y="633478"/>
+                  </a:lnTo>
+                  <a:lnTo>
+                    <a:pt x="3509503" y="643128"/>
+                  </a:lnTo>
+                  <a:lnTo>
+                    <a:pt x="3581126" y="652661"/>
+                  </a:lnTo>
+                  <a:lnTo>
+                    <a:pt x="3652748" y="662079"/>
+                  </a:lnTo>
+                  <a:lnTo>
+                    <a:pt x="3724371" y="671382"/>
+                  </a:lnTo>
+                  <a:lnTo>
+                    <a:pt x="3795993" y="680573"/>
+                  </a:lnTo>
+                  <a:lnTo>
+                    <a:pt x="3867616" y="689652"/>
+                  </a:lnTo>
+                  <a:lnTo>
+                    <a:pt x="3939238" y="698621"/>
+                  </a:lnTo>
+                  <a:lnTo>
+                    <a:pt x="4010861" y="707481"/>
+                  </a:lnTo>
+                  <a:lnTo>
+                    <a:pt x="4082483" y="716234"/>
+                  </a:lnTo>
+                  <a:lnTo>
+                    <a:pt x="4154106" y="724881"/>
+                  </a:lnTo>
+                  <a:lnTo>
+                    <a:pt x="4225729" y="733423"/>
+                  </a:lnTo>
+                  <a:lnTo>
+                    <a:pt x="4297351" y="741861"/>
+                  </a:lnTo>
+                  <a:lnTo>
+                    <a:pt x="4368974" y="750197"/>
+                  </a:lnTo>
+                  <a:lnTo>
+                    <a:pt x="4440596" y="758432"/>
+                  </a:lnTo>
+                  <a:lnTo>
+                    <a:pt x="4512219" y="766568"/>
+                  </a:lnTo>
+                  <a:lnTo>
+                    <a:pt x="4583841" y="774604"/>
+                  </a:lnTo>
+                  <a:lnTo>
+                    <a:pt x="4655464" y="782543"/>
+                  </a:lnTo>
+                  <a:lnTo>
+                    <a:pt x="4727086" y="790386"/>
+                  </a:lnTo>
+                  <a:lnTo>
+                    <a:pt x="4798709" y="798134"/>
+                  </a:lnTo>
+                  <a:lnTo>
+                    <a:pt x="4870331" y="805788"/>
+                  </a:lnTo>
+                  <a:lnTo>
+                    <a:pt x="4941954" y="813349"/>
+                  </a:lnTo>
+                  <a:lnTo>
+                    <a:pt x="5013576" y="820819"/>
+                  </a:lnTo>
+                  <a:lnTo>
+                    <a:pt x="5085199" y="828198"/>
+                  </a:lnTo>
+                  <a:lnTo>
+                    <a:pt x="5156821" y="835487"/>
+                  </a:lnTo>
+                  <a:lnTo>
+                    <a:pt x="5228444" y="842688"/>
+                  </a:lnTo>
+                  <a:lnTo>
+                    <a:pt x="5300066" y="849802"/>
+                  </a:lnTo>
+                  <a:lnTo>
+                    <a:pt x="5371689" y="856829"/>
+                  </a:lnTo>
+                  <a:lnTo>
+                    <a:pt x="5443311" y="863772"/>
+                  </a:lnTo>
+                  <a:lnTo>
+                    <a:pt x="5514934" y="870630"/>
+                  </a:lnTo>
+                  <a:lnTo>
+                    <a:pt x="5586557" y="877405"/>
+                  </a:lnTo>
+                  <a:lnTo>
+                    <a:pt x="5658179" y="884098"/>
+                  </a:lnTo>
+                  <a:lnTo>
+                    <a:pt x="5729802" y="890710"/>
+                  </a:lnTo>
+                  <a:lnTo>
+                    <a:pt x="5801424" y="897241"/>
+                  </a:lnTo>
+                  <a:lnTo>
+                    <a:pt x="5873047" y="903694"/>
+                  </a:lnTo>
+                  <a:lnTo>
+                    <a:pt x="5944669" y="910068"/>
+                  </a:lnTo>
+                  <a:lnTo>
+                    <a:pt x="6016292" y="916365"/>
+                  </a:lnTo>
+                  <a:lnTo>
+                    <a:pt x="6087914" y="922585"/>
+                  </a:lnTo>
+                  <a:lnTo>
+                    <a:pt x="6159537" y="928731"/>
+                  </a:lnTo>
+                  <a:lnTo>
+                    <a:pt x="6231159" y="934801"/>
+                  </a:lnTo>
+                  <a:lnTo>
+                    <a:pt x="6302782" y="940798"/>
+                  </a:lnTo>
+                  <a:lnTo>
+                    <a:pt x="6374404" y="946723"/>
+                  </a:lnTo>
+                  <a:lnTo>
+                    <a:pt x="6446027" y="952575"/>
+                  </a:lnTo>
+                  <a:lnTo>
+                    <a:pt x="6517649" y="958357"/>
+                  </a:lnTo>
+                  <a:lnTo>
+                    <a:pt x="6589272" y="964068"/>
+                  </a:lnTo>
+                  <a:lnTo>
+                    <a:pt x="6660894" y="969711"/>
+                  </a:lnTo>
+                  <a:lnTo>
+                    <a:pt x="6732517" y="975285"/>
+                  </a:lnTo>
+                  <a:lnTo>
+                    <a:pt x="6804139" y="980791"/>
+                  </a:lnTo>
+                  <a:lnTo>
+                    <a:pt x="6875762" y="986230"/>
+                  </a:lnTo>
+                  <a:lnTo>
+                    <a:pt x="6947385" y="991604"/>
+                  </a:lnTo>
+                  <a:lnTo>
+                    <a:pt x="7019007" y="996913"/>
+                  </a:lnTo>
+                  <a:lnTo>
+                    <a:pt x="7090630" y="1002157"/>
                   </a:lnTo>
                 </a:path>
               </a:pathLst>
@@ -4660,7 +4660,7 @@
           </p:nvSpPr>
           <p:spPr>
             <a:xfrm>
-              <a:off x="4363883" y="2073503"/>
+              <a:off x="4368185" y="2073503"/>
               <a:ext cx="0" cy="3649639"/>
             </a:xfrm>
             <a:custGeom>
@@ -4703,7 +4703,7 @@
           </p:nvSpPr>
           <p:spPr>
             <a:xfrm>
-              <a:off x="3178931" y="2073503"/>
+              <a:off x="3176242" y="2073503"/>
               <a:ext cx="0" cy="3649639"/>
             </a:xfrm>
             <a:custGeom>
@@ -4746,7 +4746,7 @@
           </p:nvSpPr>
           <p:spPr>
             <a:xfrm>
-              <a:off x="5373904" y="2073503"/>
+              <a:off x="5386913" y="2073503"/>
               <a:ext cx="0" cy="3649639"/>
             </a:xfrm>
             <a:custGeom>
@@ -5019,7 +5019,7 @@
           </p:nvSpPr>
           <p:spPr>
             <a:xfrm>
-              <a:off x="1536080" y="5785772"/>
+              <a:off x="1536741" y="5785772"/>
               <a:ext cx="161574" cy="80101"/>
             </a:xfrm>
             <a:prstGeom prst="rect">
@@ -5065,7 +5065,7 @@
           </p:nvSpPr>
           <p:spPr>
             <a:xfrm>
-              <a:off x="3342736" y="5785772"/>
+              <a:off x="3341771" y="5785772"/>
               <a:ext cx="161574" cy="80101"/>
             </a:xfrm>
             <a:prstGeom prst="rect">
@@ -5111,7 +5111,7 @@
           </p:nvSpPr>
           <p:spPr>
             <a:xfrm>
-              <a:off x="5199088" y="5785772"/>
+              <a:off x="5196500" y="5785772"/>
               <a:ext cx="62179" cy="80101"/>
             </a:xfrm>
             <a:prstGeom prst="rect">
@@ -5157,7 +5157,7 @@
           </p:nvSpPr>
           <p:spPr>
             <a:xfrm>
-              <a:off x="6974654" y="5785772"/>
+              <a:off x="6970441" y="5785772"/>
               <a:ext cx="124358" cy="80101"/>
             </a:xfrm>
             <a:prstGeom prst="rect">
@@ -5328,7 +5328,7 @@
                   <a:latin typeface="Helvetica"/>
                   <a:cs typeface="Helvetica"/>
                 </a:rPr>
-                <a:t>subHR per 10 % decline: 1.16 (0.93-1.44), p_Bonf = 1.000 (n = 6)  |  per IQR decline (Δ = 24.3 %): 1.43 (0.83-2.45)  |  IQR: [-22.7, 1.6] %</a:t>
+                <a:t>subHR per 10 % decline: 1.17 (0.94-1.45), p_Bonf = 0.996 (n = 6)  |  per IQR decline (Δ = 24.5 %): 1.46 (0.86-2.48)  |  IQR: [-22.7, 1.8] %</a:t>
               </a:r>
             </a:p>
           </p:txBody>
